--- a/TEMPLATE DEVELOPPEMENT INDIVIDUEL 2026.pptx
+++ b/TEMPLATE DEVELOPPEMENT INDIVIDUEL 2026.pptx
@@ -138,7 +138,7 @@
 <file path=ppt/revisionInfo.xml><?xml version="1.0" encoding="utf-8"?>
 <p1510:revInfo xmlns:a="http://schemas.openxmlformats.org/drawingml/2006/main" xmlns:r="http://schemas.openxmlformats.org/officeDocument/2006/relationships" xmlns:p1510="http://schemas.microsoft.com/office/powerpoint/2015/10/main">
   <p1510:revLst>
-    <p1510:client id="{DE575302-670F-4E08-BE55-2E49F6D6167B}" v="40" dt="2026-06-28T16:19:29.485"/>
+    <p1510:client id="{DE575302-670F-4E08-BE55-2E49F6D6167B}" v="3" dt="2026-06-30T07:12:02.380"/>
   </p1510:revLst>
 </p1510:revInfo>
 </file>
@@ -148,12 +148,12 @@
   <pc:docChgLst>
     <pc:chgData name="Sébastien Renaud" userId="5e596eca-c704-4701-9deb-91e2038d048e" providerId="ADAL" clId="{34329023-3EC5-4071-89E2-665FADB32EB6}"/>
     <pc:docChg chg="undo custSel addSld delSld modSld sldOrd">
-      <pc:chgData name="Sébastien Renaud" userId="5e596eca-c704-4701-9deb-91e2038d048e" providerId="ADAL" clId="{34329023-3EC5-4071-89E2-665FADB32EB6}" dt="2026-06-28T16:19:29.485" v="1776"/>
+      <pc:chgData name="Sébastien Renaud" userId="5e596eca-c704-4701-9deb-91e2038d048e" providerId="ADAL" clId="{34329023-3EC5-4071-89E2-665FADB32EB6}" dt="2026-06-30T07:13:33.966" v="2067" actId="20577"/>
       <pc:docMkLst>
         <pc:docMk/>
       </pc:docMkLst>
       <pc:sldChg chg="addSp delSp modSp add del mod setBg">
-        <pc:chgData name="Sébastien Renaud" userId="5e596eca-c704-4701-9deb-91e2038d048e" providerId="ADAL" clId="{34329023-3EC5-4071-89E2-665FADB32EB6}" dt="2026-06-28T16:19:29.485" v="1776"/>
+        <pc:chgData name="Sébastien Renaud" userId="5e596eca-c704-4701-9deb-91e2038d048e" providerId="ADAL" clId="{34329023-3EC5-4071-89E2-665FADB32EB6}" dt="2026-06-30T07:13:33.966" v="2067" actId="20577"/>
         <pc:sldMkLst>
           <pc:docMk/>
           <pc:sldMk cId="0" sldId="256"/>
@@ -166,14 +166,6 @@
             <ac:spMk id="2" creationId="{00000000-0000-0000-0000-000000000000}"/>
           </ac:spMkLst>
         </pc:spChg>
-        <pc:spChg chg="del">
-          <ac:chgData name="Sébastien Renaud" userId="5e596eca-c704-4701-9deb-91e2038d048e" providerId="ADAL" clId="{34329023-3EC5-4071-89E2-665FADB32EB6}" dt="2026-06-27T15:51:40.542" v="193" actId="478"/>
-          <ac:spMkLst>
-            <pc:docMk/>
-            <pc:sldMk cId="0" sldId="256"/>
-            <ac:spMk id="3" creationId="{00000000-0000-0000-0000-000000000000}"/>
-          </ac:spMkLst>
-        </pc:spChg>
         <pc:spChg chg="add mod">
           <ac:chgData name="Sébastien Renaud" userId="5e596eca-c704-4701-9deb-91e2038d048e" providerId="ADAL" clId="{34329023-3EC5-4071-89E2-665FADB32EB6}" dt="2026-06-28T15:49:26.882" v="1561" actId="555"/>
           <ac:spMkLst>
@@ -183,19 +175,11 @@
           </ac:spMkLst>
         </pc:spChg>
         <pc:spChg chg="add mod">
-          <ac:chgData name="Sébastien Renaud" userId="5e596eca-c704-4701-9deb-91e2038d048e" providerId="ADAL" clId="{34329023-3EC5-4071-89E2-665FADB32EB6}" dt="2026-06-28T14:45:04.185" v="1206" actId="1037"/>
+          <ac:chgData name="Sébastien Renaud" userId="5e596eca-c704-4701-9deb-91e2038d048e" providerId="ADAL" clId="{34329023-3EC5-4071-89E2-665FADB32EB6}" dt="2026-06-30T07:11:48.287" v="2002" actId="20577"/>
           <ac:spMkLst>
             <pc:docMk/>
             <pc:sldMk cId="0" sldId="256"/>
             <ac:spMk id="4" creationId="{66FE29F8-5630-87CE-6698-17129588A57A}"/>
-          </ac:spMkLst>
-        </pc:spChg>
-        <pc:spChg chg="del">
-          <ac:chgData name="Sébastien Renaud" userId="5e596eca-c704-4701-9deb-91e2038d048e" providerId="ADAL" clId="{34329023-3EC5-4071-89E2-665FADB32EB6}" dt="2026-06-27T15:51:11.700" v="177" actId="478"/>
-          <ac:spMkLst>
-            <pc:docMk/>
-            <pc:sldMk cId="0" sldId="256"/>
-            <ac:spMk id="5" creationId="{00000000-0000-0000-0000-000000000000}"/>
           </ac:spMkLst>
         </pc:spChg>
         <pc:spChg chg="add mod">
@@ -206,28 +190,12 @@
             <ac:spMk id="5" creationId="{E1FC14C0-0487-0212-AF05-242ECBDBB79A}"/>
           </ac:spMkLst>
         </pc:spChg>
-        <pc:spChg chg="del">
-          <ac:chgData name="Sébastien Renaud" userId="5e596eca-c704-4701-9deb-91e2038d048e" providerId="ADAL" clId="{34329023-3EC5-4071-89E2-665FADB32EB6}" dt="2026-06-27T15:51:09.524" v="176" actId="478"/>
-          <ac:spMkLst>
-            <pc:docMk/>
-            <pc:sldMk cId="0" sldId="256"/>
-            <ac:spMk id="6" creationId="{00000000-0000-0000-0000-000000000000}"/>
-          </ac:spMkLst>
-        </pc:spChg>
         <pc:spChg chg="add mod">
           <ac:chgData name="Sébastien Renaud" userId="5e596eca-c704-4701-9deb-91e2038d048e" providerId="ADAL" clId="{34329023-3EC5-4071-89E2-665FADB32EB6}" dt="2026-06-28T14:45:04.185" v="1206" actId="1037"/>
           <ac:spMkLst>
             <pc:docMk/>
             <pc:sldMk cId="0" sldId="256"/>
             <ac:spMk id="6" creationId="{B2F53460-55E2-2B21-4536-F4327BEE563D}"/>
-          </ac:spMkLst>
-        </pc:spChg>
-        <pc:spChg chg="del">
-          <ac:chgData name="Sébastien Renaud" userId="5e596eca-c704-4701-9deb-91e2038d048e" providerId="ADAL" clId="{34329023-3EC5-4071-89E2-665FADB32EB6}" dt="2026-06-27T15:51:15.732" v="178" actId="478"/>
-          <ac:spMkLst>
-            <pc:docMk/>
-            <pc:sldMk cId="0" sldId="256"/>
-            <ac:spMk id="7" creationId="{00000000-0000-0000-0000-000000000000}"/>
           </ac:spMkLst>
         </pc:spChg>
         <pc:spChg chg="add mod">
@@ -246,28 +214,12 @@
             <ac:spMk id="8" creationId="{00000000-0000-0000-0000-000000000000}"/>
           </ac:spMkLst>
         </pc:spChg>
-        <pc:spChg chg="del mod">
-          <ac:chgData name="Sébastien Renaud" userId="5e596eca-c704-4701-9deb-91e2038d048e" providerId="ADAL" clId="{34329023-3EC5-4071-89E2-665FADB32EB6}" dt="2026-06-27T15:54:49.244" v="232" actId="478"/>
-          <ac:spMkLst>
-            <pc:docMk/>
-            <pc:sldMk cId="0" sldId="256"/>
-            <ac:spMk id="9" creationId="{00000000-0000-0000-0000-000000000000}"/>
-          </ac:spMkLst>
-        </pc:spChg>
         <pc:spChg chg="add mod">
           <ac:chgData name="Sébastien Renaud" userId="5e596eca-c704-4701-9deb-91e2038d048e" providerId="ADAL" clId="{34329023-3EC5-4071-89E2-665FADB32EB6}" dt="2026-06-28T14:45:04.185" v="1206" actId="1037"/>
           <ac:spMkLst>
             <pc:docMk/>
             <pc:sldMk cId="0" sldId="256"/>
             <ac:spMk id="9" creationId="{AFA0A710-364F-5377-5120-A437A505D05A}"/>
-          </ac:spMkLst>
-        </pc:spChg>
-        <pc:spChg chg="del">
-          <ac:chgData name="Sébastien Renaud" userId="5e596eca-c704-4701-9deb-91e2038d048e" providerId="ADAL" clId="{34329023-3EC5-4071-89E2-665FADB32EB6}" dt="2026-06-27T15:53:30.637" v="195" actId="478"/>
-          <ac:spMkLst>
-            <pc:docMk/>
-            <pc:sldMk cId="0" sldId="256"/>
-            <ac:spMk id="10" creationId="{00000000-0000-0000-0000-000000000000}"/>
           </ac:spMkLst>
         </pc:spChg>
         <pc:spChg chg="add mod">
@@ -286,14 +238,6 @@
             <ac:spMk id="11" creationId="{00000000-0000-0000-0000-000000000000}"/>
           </ac:spMkLst>
         </pc:spChg>
-        <pc:spChg chg="del">
-          <ac:chgData name="Sébastien Renaud" userId="5e596eca-c704-4701-9deb-91e2038d048e" providerId="ADAL" clId="{34329023-3EC5-4071-89E2-665FADB32EB6}" dt="2026-06-27T15:54:46.683" v="230" actId="478"/>
-          <ac:spMkLst>
-            <pc:docMk/>
-            <pc:sldMk cId="0" sldId="256"/>
-            <ac:spMk id="12" creationId="{00000000-0000-0000-0000-000000000000}"/>
-          </ac:spMkLst>
-        </pc:spChg>
         <pc:spChg chg="add mod">
           <ac:chgData name="Sébastien Renaud" userId="5e596eca-c704-4701-9deb-91e2038d048e" providerId="ADAL" clId="{34329023-3EC5-4071-89E2-665FADB32EB6}" dt="2026-06-28T14:45:04.185" v="1206" actId="1037"/>
           <ac:spMkLst>
@@ -310,14 +254,6 @@
             <ac:spMk id="13" creationId="{00000000-0000-0000-0000-000000000000}"/>
           </ac:spMkLst>
         </pc:spChg>
-        <pc:spChg chg="del">
-          <ac:chgData name="Sébastien Renaud" userId="5e596eca-c704-4701-9deb-91e2038d048e" providerId="ADAL" clId="{34329023-3EC5-4071-89E2-665FADB32EB6}" dt="2026-06-27T15:54:51.832" v="233" actId="478"/>
-          <ac:spMkLst>
-            <pc:docMk/>
-            <pc:sldMk cId="0" sldId="256"/>
-            <ac:spMk id="14" creationId="{00000000-0000-0000-0000-000000000000}"/>
-          </ac:spMkLst>
-        </pc:spChg>
         <pc:spChg chg="add mod">
           <ac:chgData name="Sébastien Renaud" userId="5e596eca-c704-4701-9deb-91e2038d048e" providerId="ADAL" clId="{34329023-3EC5-4071-89E2-665FADB32EB6}" dt="2026-06-28T14:45:04.185" v="1206" actId="1037"/>
           <ac:spMkLst>
@@ -326,12 +262,12 @@
             <ac:spMk id="14" creationId="{10BCFC0F-C173-DE50-CACD-946CB9BE4B2D}"/>
           </ac:spMkLst>
         </pc:spChg>
-        <pc:spChg chg="del">
-          <ac:chgData name="Sébastien Renaud" userId="5e596eca-c704-4701-9deb-91e2038d048e" providerId="ADAL" clId="{34329023-3EC5-4071-89E2-665FADB32EB6}" dt="2026-06-27T15:54:48.067" v="231" actId="478"/>
+        <pc:spChg chg="add mod">
+          <ac:chgData name="Sébastien Renaud" userId="5e596eca-c704-4701-9deb-91e2038d048e" providerId="ADAL" clId="{34329023-3EC5-4071-89E2-665FADB32EB6}" dt="2026-06-30T07:12:49.816" v="2062" actId="552"/>
           <ac:spMkLst>
             <pc:docMk/>
             <pc:sldMk cId="0" sldId="256"/>
-            <ac:spMk id="15" creationId="{00000000-0000-0000-0000-000000000000}"/>
+            <ac:spMk id="15" creationId="{6B737596-02C1-60E0-07FC-CC6AB3DF139C}"/>
           </ac:spMkLst>
         </pc:spChg>
         <pc:spChg chg="mod">
@@ -374,56 +310,56 @@
             <ac:spMk id="21" creationId="{00000000-0000-0000-0000-000000000000}"/>
           </ac:spMkLst>
         </pc:spChg>
-        <pc:spChg chg="del mod">
-          <ac:chgData name="Sébastien Renaud" userId="5e596eca-c704-4701-9deb-91e2038d048e" providerId="ADAL" clId="{34329023-3EC5-4071-89E2-665FADB32EB6}" dt="2026-06-27T20:29:23.646" v="711" actId="478"/>
+        <pc:spChg chg="add mod">
+          <ac:chgData name="Sébastien Renaud" userId="5e596eca-c704-4701-9deb-91e2038d048e" providerId="ADAL" clId="{34329023-3EC5-4071-89E2-665FADB32EB6}" dt="2026-06-30T07:09:22.331" v="1911" actId="1036"/>
           <ac:spMkLst>
             <pc:docMk/>
             <pc:sldMk cId="0" sldId="256"/>
-            <ac:spMk id="22" creationId="{00000000-0000-0000-0000-000000000000}"/>
+            <ac:spMk id="22" creationId="{5081D21A-9837-CE00-B796-B67EE55E0224}"/>
           </ac:spMkLst>
         </pc:spChg>
-        <pc:spChg chg="mod">
-          <ac:chgData name="Sébastien Renaud" userId="5e596eca-c704-4701-9deb-91e2038d048e" providerId="ADAL" clId="{34329023-3EC5-4071-89E2-665FADB32EB6}" dt="2026-06-27T20:28:41.457" v="671" actId="207"/>
+        <pc:spChg chg="del mod">
+          <ac:chgData name="Sébastien Renaud" userId="5e596eca-c704-4701-9deb-91e2038d048e" providerId="ADAL" clId="{34329023-3EC5-4071-89E2-665FADB32EB6}" dt="2026-06-30T07:08:50.837" v="1777" actId="478"/>
           <ac:spMkLst>
             <pc:docMk/>
             <pc:sldMk cId="0" sldId="256"/>
             <ac:spMk id="23" creationId="{00000000-0000-0000-0000-000000000000}"/>
           </ac:spMkLst>
         </pc:spChg>
-        <pc:spChg chg="mod">
-          <ac:chgData name="Sébastien Renaud" userId="5e596eca-c704-4701-9deb-91e2038d048e" providerId="ADAL" clId="{34329023-3EC5-4071-89E2-665FADB32EB6}" dt="2026-06-28T15:53:39.435" v="1690" actId="12788"/>
+        <pc:spChg chg="del mod">
+          <ac:chgData name="Sébastien Renaud" userId="5e596eca-c704-4701-9deb-91e2038d048e" providerId="ADAL" clId="{34329023-3EC5-4071-89E2-665FADB32EB6}" dt="2026-06-30T07:08:51.853" v="1778" actId="478"/>
           <ac:spMkLst>
             <pc:docMk/>
             <pc:sldMk cId="0" sldId="256"/>
             <ac:spMk id="24" creationId="{00000000-0000-0000-0000-000000000000}"/>
           </ac:spMkLst>
         </pc:spChg>
-        <pc:spChg chg="mod">
-          <ac:chgData name="Sébastien Renaud" userId="5e596eca-c704-4701-9deb-91e2038d048e" providerId="ADAL" clId="{34329023-3EC5-4071-89E2-665FADB32EB6}" dt="2026-06-28T15:53:39.435" v="1690" actId="12788"/>
+        <pc:spChg chg="del mod">
+          <ac:chgData name="Sébastien Renaud" userId="5e596eca-c704-4701-9deb-91e2038d048e" providerId="ADAL" clId="{34329023-3EC5-4071-89E2-665FADB32EB6}" dt="2026-06-30T07:08:50.837" v="1777" actId="478"/>
           <ac:spMkLst>
             <pc:docMk/>
             <pc:sldMk cId="0" sldId="256"/>
             <ac:spMk id="25" creationId="{00000000-0000-0000-0000-000000000000}"/>
           </ac:spMkLst>
         </pc:spChg>
-        <pc:spChg chg="mod">
-          <ac:chgData name="Sébastien Renaud" userId="5e596eca-c704-4701-9deb-91e2038d048e" providerId="ADAL" clId="{34329023-3EC5-4071-89E2-665FADB32EB6}" dt="2026-06-27T20:28:41.457" v="671" actId="207"/>
+        <pc:spChg chg="del mod">
+          <ac:chgData name="Sébastien Renaud" userId="5e596eca-c704-4701-9deb-91e2038d048e" providerId="ADAL" clId="{34329023-3EC5-4071-89E2-665FADB32EB6}" dt="2026-06-30T07:08:50.837" v="1777" actId="478"/>
           <ac:spMkLst>
             <pc:docMk/>
             <pc:sldMk cId="0" sldId="256"/>
             <ac:spMk id="26" creationId="{00000000-0000-0000-0000-000000000000}"/>
           </ac:spMkLst>
         </pc:spChg>
-        <pc:spChg chg="del">
-          <ac:chgData name="Sébastien Renaud" userId="5e596eca-c704-4701-9deb-91e2038d048e" providerId="ADAL" clId="{34329023-3EC5-4071-89E2-665FADB32EB6}" dt="2026-06-27T20:34:27.514" v="948" actId="478"/>
+        <pc:spChg chg="add mod">
+          <ac:chgData name="Sébastien Renaud" userId="5e596eca-c704-4701-9deb-91e2038d048e" providerId="ADAL" clId="{34329023-3EC5-4071-89E2-665FADB32EB6}" dt="2026-06-30T07:13:20.806" v="2065" actId="552"/>
           <ac:spMkLst>
             <pc:docMk/>
             <pc:sldMk cId="0" sldId="256"/>
-            <ac:spMk id="27" creationId="{00000000-0000-0000-0000-000000000000}"/>
+            <ac:spMk id="27" creationId="{7BA4FAB0-6209-C8B0-5488-975F35F7133C}"/>
           </ac:spMkLst>
         </pc:spChg>
-        <pc:spChg chg="mod">
-          <ac:chgData name="Sébastien Renaud" userId="5e596eca-c704-4701-9deb-91e2038d048e" providerId="ADAL" clId="{34329023-3EC5-4071-89E2-665FADB32EB6}" dt="2026-06-28T15:51:03.657" v="1619" actId="1037"/>
+        <pc:spChg chg="del mod">
+          <ac:chgData name="Sébastien Renaud" userId="5e596eca-c704-4701-9deb-91e2038d048e" providerId="ADAL" clId="{34329023-3EC5-4071-89E2-665FADB32EB6}" dt="2026-06-30T07:09:55.893" v="1912" actId="478"/>
           <ac:spMkLst>
             <pc:docMk/>
             <pc:sldMk cId="0" sldId="256"/>
@@ -438,48 +374,48 @@
             <ac:spMk id="29" creationId="{00000000-0000-0000-0000-000000000000}"/>
           </ac:spMkLst>
         </pc:spChg>
-        <pc:spChg chg="mod">
-          <ac:chgData name="Sébastien Renaud" userId="5e596eca-c704-4701-9deb-91e2038d048e" providerId="ADAL" clId="{34329023-3EC5-4071-89E2-665FADB32EB6}" dt="2026-06-28T15:53:39.435" v="1690" actId="12788"/>
+        <pc:spChg chg="del mod">
+          <ac:chgData name="Sébastien Renaud" userId="5e596eca-c704-4701-9deb-91e2038d048e" providerId="ADAL" clId="{34329023-3EC5-4071-89E2-665FADB32EB6}" dt="2026-06-30T07:09:55.893" v="1912" actId="478"/>
           <ac:spMkLst>
             <pc:docMk/>
             <pc:sldMk cId="0" sldId="256"/>
             <ac:spMk id="30" creationId="{00000000-0000-0000-0000-000000000000}"/>
           </ac:spMkLst>
         </pc:spChg>
-        <pc:spChg chg="mod">
-          <ac:chgData name="Sébastien Renaud" userId="5e596eca-c704-4701-9deb-91e2038d048e" providerId="ADAL" clId="{34329023-3EC5-4071-89E2-665FADB32EB6}" dt="2026-06-28T15:51:03.657" v="1619" actId="1037"/>
+        <pc:spChg chg="del mod">
+          <ac:chgData name="Sébastien Renaud" userId="5e596eca-c704-4701-9deb-91e2038d048e" providerId="ADAL" clId="{34329023-3EC5-4071-89E2-665FADB32EB6}" dt="2026-06-30T07:09:55.893" v="1912" actId="478"/>
           <ac:spMkLst>
             <pc:docMk/>
             <pc:sldMk cId="0" sldId="256"/>
             <ac:spMk id="31" creationId="{00000000-0000-0000-0000-000000000000}"/>
           </ac:spMkLst>
         </pc:spChg>
-        <pc:spChg chg="del">
-          <ac:chgData name="Sébastien Renaud" userId="5e596eca-c704-4701-9deb-91e2038d048e" providerId="ADAL" clId="{34329023-3EC5-4071-89E2-665FADB32EB6}" dt="2026-06-27T20:35:16.110" v="990" actId="478"/>
+        <pc:spChg chg="add mod">
+          <ac:chgData name="Sébastien Renaud" userId="5e596eca-c704-4701-9deb-91e2038d048e" providerId="ADAL" clId="{34329023-3EC5-4071-89E2-665FADB32EB6}" dt="2026-06-30T07:13:00.783" v="2063" actId="552"/>
           <ac:spMkLst>
             <pc:docMk/>
             <pc:sldMk cId="0" sldId="256"/>
-            <ac:spMk id="32" creationId="{00000000-0000-0000-0000-000000000000}"/>
+            <ac:spMk id="32" creationId="{F8972F5D-2925-BF7A-577A-7CCC3DED9735}"/>
           </ac:spMkLst>
         </pc:spChg>
-        <pc:spChg chg="mod">
-          <ac:chgData name="Sébastien Renaud" userId="5e596eca-c704-4701-9deb-91e2038d048e" providerId="ADAL" clId="{34329023-3EC5-4071-89E2-665FADB32EB6}" dt="2026-06-28T15:49:38.872" v="1590" actId="1037"/>
+        <pc:spChg chg="del mod">
+          <ac:chgData name="Sébastien Renaud" userId="5e596eca-c704-4701-9deb-91e2038d048e" providerId="ADAL" clId="{34329023-3EC5-4071-89E2-665FADB32EB6}" dt="2026-06-30T07:09:55.893" v="1912" actId="478"/>
           <ac:spMkLst>
             <pc:docMk/>
             <pc:sldMk cId="0" sldId="256"/>
             <ac:spMk id="33" creationId="{00000000-0000-0000-0000-000000000000}"/>
           </ac:spMkLst>
         </pc:spChg>
-        <pc:spChg chg="mod">
-          <ac:chgData name="Sébastien Renaud" userId="5e596eca-c704-4701-9deb-91e2038d048e" providerId="ADAL" clId="{34329023-3EC5-4071-89E2-665FADB32EB6}" dt="2026-06-28T15:53:39.435" v="1690" actId="12788"/>
+        <pc:spChg chg="del mod">
+          <ac:chgData name="Sébastien Renaud" userId="5e596eca-c704-4701-9deb-91e2038d048e" providerId="ADAL" clId="{34329023-3EC5-4071-89E2-665FADB32EB6}" dt="2026-06-30T07:09:55.893" v="1912" actId="478"/>
           <ac:spMkLst>
             <pc:docMk/>
             <pc:sldMk cId="0" sldId="256"/>
             <ac:spMk id="34" creationId="{00000000-0000-0000-0000-000000000000}"/>
           </ac:spMkLst>
         </pc:spChg>
-        <pc:spChg chg="mod">
-          <ac:chgData name="Sébastien Renaud" userId="5e596eca-c704-4701-9deb-91e2038d048e" providerId="ADAL" clId="{34329023-3EC5-4071-89E2-665FADB32EB6}" dt="2026-06-28T15:53:39.435" v="1690" actId="12788"/>
+        <pc:spChg chg="del mod">
+          <ac:chgData name="Sébastien Renaud" userId="5e596eca-c704-4701-9deb-91e2038d048e" providerId="ADAL" clId="{34329023-3EC5-4071-89E2-665FADB32EB6}" dt="2026-06-30T07:09:55.893" v="1912" actId="478"/>
           <ac:spMkLst>
             <pc:docMk/>
             <pc:sldMk cId="0" sldId="256"/>
@@ -566,8 +502,8 @@
             <ac:spMk id="47" creationId="{00000000-0000-0000-0000-000000000000}"/>
           </ac:spMkLst>
         </pc:spChg>
-        <pc:spChg chg="mod">
-          <ac:chgData name="Sébastien Renaud" userId="5e596eca-c704-4701-9deb-91e2038d048e" providerId="ADAL" clId="{34329023-3EC5-4071-89E2-665FADB32EB6}" dt="2026-06-28T15:50:12.955" v="1592" actId="555"/>
+        <pc:spChg chg="add del mod">
+          <ac:chgData name="Sébastien Renaud" userId="5e596eca-c704-4701-9deb-91e2038d048e" providerId="ADAL" clId="{34329023-3EC5-4071-89E2-665FADB32EB6}" dt="2026-06-30T07:11:25.052" v="1997" actId="554"/>
           <ac:spMkLst>
             <pc:docMk/>
             <pc:sldMk cId="0" sldId="256"/>
@@ -575,7 +511,7 @@
           </ac:spMkLst>
         </pc:spChg>
         <pc:spChg chg="mod">
-          <ac:chgData name="Sébastien Renaud" userId="5e596eca-c704-4701-9deb-91e2038d048e" providerId="ADAL" clId="{34329023-3EC5-4071-89E2-665FADB32EB6}" dt="2026-06-28T14:42:28.898" v="1138" actId="14100"/>
+          <ac:chgData name="Sébastien Renaud" userId="5e596eca-c704-4701-9deb-91e2038d048e" providerId="ADAL" clId="{34329023-3EC5-4071-89E2-665FADB32EB6}" dt="2026-06-30T07:10:35.473" v="1992" actId="554"/>
           <ac:spMkLst>
             <pc:docMk/>
             <pc:sldMk cId="0" sldId="256"/>
@@ -591,7 +527,15 @@
           </ac:spMkLst>
         </pc:spChg>
         <pc:spChg chg="mod">
-          <ac:chgData name="Sébastien Renaud" userId="5e596eca-c704-4701-9deb-91e2038d048e" providerId="ADAL" clId="{34329023-3EC5-4071-89E2-665FADB32EB6}" dt="2026-06-27T20:37:15.163" v="1084" actId="1035"/>
+          <ac:chgData name="Sébastien Renaud" userId="5e596eca-c704-4701-9deb-91e2038d048e" providerId="ADAL" clId="{34329023-3EC5-4071-89E2-665FADB32EB6}" dt="2026-06-30T07:10:35.473" v="1992" actId="554"/>
+          <ac:spMkLst>
+            <pc:docMk/>
+            <pc:sldMk cId="0" sldId="256"/>
+            <ac:spMk id="52" creationId="{00000000-0000-0000-0000-000000000000}"/>
+          </ac:spMkLst>
+        </pc:spChg>
+        <pc:spChg chg="mod">
+          <ac:chgData name="Sébastien Renaud" userId="5e596eca-c704-4701-9deb-91e2038d048e" providerId="ADAL" clId="{34329023-3EC5-4071-89E2-665FADB32EB6}" dt="2026-06-30T07:10:35.473" v="1992" actId="554"/>
           <ac:spMkLst>
             <pc:docMk/>
             <pc:sldMk cId="0" sldId="256"/>
@@ -622,20 +566,20 @@
             <ac:spMk id="57" creationId="{00000000-0000-0000-0000-000000000000}"/>
           </ac:spMkLst>
         </pc:spChg>
-        <pc:spChg chg="del">
-          <ac:chgData name="Sébastien Renaud" userId="5e596eca-c704-4701-9deb-91e2038d048e" providerId="ADAL" clId="{34329023-3EC5-4071-89E2-665FADB32EB6}" dt="2026-06-27T20:43:22.175" v="1136" actId="478"/>
+        <pc:spChg chg="add mod">
+          <ac:chgData name="Sébastien Renaud" userId="5e596eca-c704-4701-9deb-91e2038d048e" providerId="ADAL" clId="{34329023-3EC5-4071-89E2-665FADB32EB6}" dt="2026-06-30T07:13:10.329" v="2064" actId="552"/>
           <ac:spMkLst>
             <pc:docMk/>
             <pc:sldMk cId="0" sldId="256"/>
-            <ac:spMk id="58" creationId="{00000000-0000-0000-0000-000000000000}"/>
+            <ac:spMk id="58" creationId="{0B156722-C043-DA28-CFCC-04A8C95BBD84}"/>
           </ac:spMkLst>
         </pc:spChg>
-        <pc:spChg chg="del">
-          <ac:chgData name="Sébastien Renaud" userId="5e596eca-c704-4701-9deb-91e2038d048e" providerId="ADAL" clId="{34329023-3EC5-4071-89E2-665FADB32EB6}" dt="2026-06-27T20:43:06.792" v="1130" actId="478"/>
+        <pc:spChg chg="add mod">
+          <ac:chgData name="Sébastien Renaud" userId="5e596eca-c704-4701-9deb-91e2038d048e" providerId="ADAL" clId="{34329023-3EC5-4071-89E2-665FADB32EB6}" dt="2026-06-30T07:13:00.783" v="2063" actId="552"/>
           <ac:spMkLst>
             <pc:docMk/>
             <pc:sldMk cId="0" sldId="256"/>
-            <ac:spMk id="59" creationId="{00000000-0000-0000-0000-000000000000}"/>
+            <ac:spMk id="59" creationId="{D346899E-3B55-95C5-A06D-E854FD577221}"/>
           </ac:spMkLst>
         </pc:spChg>
         <pc:spChg chg="mod">
@@ -694,28 +638,28 @@
             <ac:spMk id="66" creationId="{00000000-0000-0000-0000-000000000000}"/>
           </ac:spMkLst>
         </pc:spChg>
-        <pc:spChg chg="del">
-          <ac:chgData name="Sébastien Renaud" userId="5e596eca-c704-4701-9deb-91e2038d048e" providerId="ADAL" clId="{34329023-3EC5-4071-89E2-665FADB32EB6}" dt="2026-06-28T15:46:22.054" v="1517" actId="478"/>
+        <pc:spChg chg="add mod">
+          <ac:chgData name="Sébastien Renaud" userId="5e596eca-c704-4701-9deb-91e2038d048e" providerId="ADAL" clId="{34329023-3EC5-4071-89E2-665FADB32EB6}" dt="2026-06-30T07:13:10.329" v="2064" actId="552"/>
           <ac:spMkLst>
             <pc:docMk/>
             <pc:sldMk cId="0" sldId="256"/>
-            <ac:spMk id="67" creationId="{00000000-0000-0000-0000-000000000000}"/>
+            <ac:spMk id="67" creationId="{025D4EC3-DBA1-A8D8-F29E-DB6CC96C056A}"/>
           </ac:spMkLst>
         </pc:spChg>
-        <pc:spChg chg="del">
-          <ac:chgData name="Sébastien Renaud" userId="5e596eca-c704-4701-9deb-91e2038d048e" providerId="ADAL" clId="{34329023-3EC5-4071-89E2-665FADB32EB6}" dt="2026-06-28T15:46:20.398" v="1516" actId="478"/>
+        <pc:spChg chg="add mod">
+          <ac:chgData name="Sébastien Renaud" userId="5e596eca-c704-4701-9deb-91e2038d048e" providerId="ADAL" clId="{34329023-3EC5-4071-89E2-665FADB32EB6}" dt="2026-06-30T07:11:25.052" v="1997" actId="554"/>
           <ac:spMkLst>
             <pc:docMk/>
             <pc:sldMk cId="0" sldId="256"/>
-            <ac:spMk id="68" creationId="{00000000-0000-0000-0000-000000000000}"/>
+            <ac:spMk id="68" creationId="{58327C7E-6C4C-5AB7-69BF-9C89FEA9A206}"/>
           </ac:spMkLst>
         </pc:spChg>
-        <pc:spChg chg="del">
-          <ac:chgData name="Sébastien Renaud" userId="5e596eca-c704-4701-9deb-91e2038d048e" providerId="ADAL" clId="{34329023-3EC5-4071-89E2-665FADB32EB6}" dt="2026-06-28T15:46:23.782" v="1518" actId="478"/>
+        <pc:spChg chg="add mod">
+          <ac:chgData name="Sébastien Renaud" userId="5e596eca-c704-4701-9deb-91e2038d048e" providerId="ADAL" clId="{34329023-3EC5-4071-89E2-665FADB32EB6}" dt="2026-06-30T07:12:42.093" v="2061" actId="552"/>
           <ac:spMkLst>
             <pc:docMk/>
             <pc:sldMk cId="0" sldId="256"/>
-            <ac:spMk id="69" creationId="{00000000-0000-0000-0000-000000000000}"/>
+            <ac:spMk id="69" creationId="{B32A587C-158D-B962-ADC3-0B5356595A80}"/>
           </ac:spMkLst>
         </pc:spChg>
         <pc:spChg chg="mod">
@@ -734,12 +678,12 @@
             <ac:spMk id="71" creationId="{00000000-0000-0000-0000-000000000000}"/>
           </ac:spMkLst>
         </pc:spChg>
-        <pc:spChg chg="del mod">
-          <ac:chgData name="Sébastien Renaud" userId="5e596eca-c704-4701-9deb-91e2038d048e" providerId="ADAL" clId="{34329023-3EC5-4071-89E2-665FADB32EB6}" dt="2026-06-27T16:02:46.473" v="372" actId="478"/>
+        <pc:spChg chg="add mod">
+          <ac:chgData name="Sébastien Renaud" userId="5e596eca-c704-4701-9deb-91e2038d048e" providerId="ADAL" clId="{34329023-3EC5-4071-89E2-665FADB32EB6}" dt="2026-06-30T07:12:49.816" v="2062" actId="552"/>
           <ac:spMkLst>
             <pc:docMk/>
             <pc:sldMk cId="0" sldId="256"/>
-            <ac:spMk id="72" creationId="{00000000-0000-0000-0000-000000000000}"/>
+            <ac:spMk id="72" creationId="{F2EC884A-074A-6CA6-C0B8-8ABB43D1E10E}"/>
           </ac:spMkLst>
         </pc:spChg>
         <pc:spChg chg="mod ord">
@@ -766,68 +710,68 @@
             <ac:spMk id="76" creationId="{F546A0C5-6EB6-5192-F78F-6E9DF8C5CB89}"/>
           </ac:spMkLst>
         </pc:spChg>
-        <pc:spChg chg="add del mod">
-          <ac:chgData name="Sébastien Renaud" userId="5e596eca-c704-4701-9deb-91e2038d048e" providerId="ADAL" clId="{34329023-3EC5-4071-89E2-665FADB32EB6}" dt="2026-06-27T20:25:59.435" v="530" actId="478"/>
+        <pc:spChg chg="add mod">
+          <ac:chgData name="Sébastien Renaud" userId="5e596eca-c704-4701-9deb-91e2038d048e" providerId="ADAL" clId="{34329023-3EC5-4071-89E2-665FADB32EB6}" dt="2026-06-30T07:10:35.473" v="1992" actId="554"/>
           <ac:spMkLst>
             <pc:docMk/>
             <pc:sldMk cId="0" sldId="256"/>
-            <ac:spMk id="77" creationId="{3524E55A-8555-CA88-9BD1-CCF091D6C0CC}"/>
+            <ac:spMk id="77" creationId="{1A8BBDE0-7589-7396-9282-7CB1B2DA47D8}"/>
           </ac:spMkLst>
         </pc:spChg>
-        <pc:spChg chg="add del mod">
-          <ac:chgData name="Sébastien Renaud" userId="5e596eca-c704-4701-9deb-91e2038d048e" providerId="ADAL" clId="{34329023-3EC5-4071-89E2-665FADB32EB6}" dt="2026-06-27T20:25:59.435" v="530" actId="478"/>
+        <pc:spChg chg="add mod">
+          <ac:chgData name="Sébastien Renaud" userId="5e596eca-c704-4701-9deb-91e2038d048e" providerId="ADAL" clId="{34329023-3EC5-4071-89E2-665FADB32EB6}" dt="2026-06-30T07:13:20.806" v="2065" actId="552"/>
           <ac:spMkLst>
             <pc:docMk/>
             <pc:sldMk cId="0" sldId="256"/>
-            <ac:spMk id="78" creationId="{6D0A2916-F531-9324-837B-CF970CCB02FE}"/>
+            <ac:spMk id="78" creationId="{00D82A62-F38F-12A3-8B84-74DCA807C624}"/>
           </ac:spMkLst>
         </pc:spChg>
-        <pc:spChg chg="add del mod">
-          <ac:chgData name="Sébastien Renaud" userId="5e596eca-c704-4701-9deb-91e2038d048e" providerId="ADAL" clId="{34329023-3EC5-4071-89E2-665FADB32EB6}" dt="2026-06-27T20:25:59.435" v="530" actId="478"/>
+        <pc:spChg chg="add mod">
+          <ac:chgData name="Sébastien Renaud" userId="5e596eca-c704-4701-9deb-91e2038d048e" providerId="ADAL" clId="{34329023-3EC5-4071-89E2-665FADB32EB6}" dt="2026-06-30T07:13:00.783" v="2063" actId="552"/>
           <ac:spMkLst>
             <pc:docMk/>
             <pc:sldMk cId="0" sldId="256"/>
-            <ac:spMk id="79" creationId="{7B81CFD7-D0CF-5876-91C0-B75578A16C0E}"/>
+            <ac:spMk id="79" creationId="{8C878A65-97BA-6C70-81D6-3CD5C93CC332}"/>
           </ac:spMkLst>
         </pc:spChg>
-        <pc:spChg chg="add del mod">
-          <ac:chgData name="Sébastien Renaud" userId="5e596eca-c704-4701-9deb-91e2038d048e" providerId="ADAL" clId="{34329023-3EC5-4071-89E2-665FADB32EB6}" dt="2026-06-27T20:25:59.435" v="530" actId="478"/>
+        <pc:spChg chg="add mod">
+          <ac:chgData name="Sébastien Renaud" userId="5e596eca-c704-4701-9deb-91e2038d048e" providerId="ADAL" clId="{34329023-3EC5-4071-89E2-665FADB32EB6}" dt="2026-06-30T07:13:10.329" v="2064" actId="552"/>
           <ac:spMkLst>
             <pc:docMk/>
             <pc:sldMk cId="0" sldId="256"/>
-            <ac:spMk id="80" creationId="{295079BA-49D0-813E-7994-62AC6C89E8C3}"/>
+            <ac:spMk id="80" creationId="{877AD5EB-4AFB-0004-AB54-1632E7AF58F8}"/>
           </ac:spMkLst>
         </pc:spChg>
-        <pc:spChg chg="add del mod">
-          <ac:chgData name="Sébastien Renaud" userId="5e596eca-c704-4701-9deb-91e2038d048e" providerId="ADAL" clId="{34329023-3EC5-4071-89E2-665FADB32EB6}" dt="2026-06-27T20:25:59.435" v="530" actId="478"/>
+        <pc:spChg chg="add mod">
+          <ac:chgData name="Sébastien Renaud" userId="5e596eca-c704-4701-9deb-91e2038d048e" providerId="ADAL" clId="{34329023-3EC5-4071-89E2-665FADB32EB6}" dt="2026-06-30T07:13:00.783" v="2063" actId="552"/>
           <ac:spMkLst>
             <pc:docMk/>
             <pc:sldMk cId="0" sldId="256"/>
-            <ac:spMk id="81" creationId="{534FED14-40CC-C105-3151-1F744B428E3E}"/>
+            <ac:spMk id="81" creationId="{A028F68C-AED7-276A-5824-D824C2832ECA}"/>
           </ac:spMkLst>
         </pc:spChg>
-        <pc:spChg chg="add del mod">
-          <ac:chgData name="Sébastien Renaud" userId="5e596eca-c704-4701-9deb-91e2038d048e" providerId="ADAL" clId="{34329023-3EC5-4071-89E2-665FADB32EB6}" dt="2026-06-27T20:25:59.435" v="530" actId="478"/>
+        <pc:spChg chg="add mod">
+          <ac:chgData name="Sébastien Renaud" userId="5e596eca-c704-4701-9deb-91e2038d048e" providerId="ADAL" clId="{34329023-3EC5-4071-89E2-665FADB32EB6}" dt="2026-06-30T07:13:10.329" v="2064" actId="552"/>
           <ac:spMkLst>
             <pc:docMk/>
             <pc:sldMk cId="0" sldId="256"/>
-            <ac:spMk id="82" creationId="{9F8B8327-AA11-1B4E-49CD-7AB2A1BB7ACF}"/>
+            <ac:spMk id="82" creationId="{14797367-2EAC-AC10-6C57-5775E0420A8A}"/>
           </ac:spMkLst>
         </pc:spChg>
-        <pc:spChg chg="add del mod">
-          <ac:chgData name="Sébastien Renaud" userId="5e596eca-c704-4701-9deb-91e2038d048e" providerId="ADAL" clId="{34329023-3EC5-4071-89E2-665FADB32EB6}" dt="2026-06-27T20:25:59.435" v="530" actId="478"/>
+        <pc:spChg chg="add mod">
+          <ac:chgData name="Sébastien Renaud" userId="5e596eca-c704-4701-9deb-91e2038d048e" providerId="ADAL" clId="{34329023-3EC5-4071-89E2-665FADB32EB6}" dt="2026-06-30T07:12:25.853" v="2060" actId="1038"/>
           <ac:spMkLst>
             <pc:docMk/>
             <pc:sldMk cId="0" sldId="256"/>
-            <ac:spMk id="83" creationId="{6D91A509-E513-2C49-892D-47C27089721C}"/>
+            <ac:spMk id="83" creationId="{DD32375A-CF86-865D-B71C-9FDCD2C70416}"/>
           </ac:spMkLst>
         </pc:spChg>
-        <pc:spChg chg="add del mod">
-          <ac:chgData name="Sébastien Renaud" userId="5e596eca-c704-4701-9deb-91e2038d048e" providerId="ADAL" clId="{34329023-3EC5-4071-89E2-665FADB32EB6}" dt="2026-06-27T20:25:59.435" v="530" actId="478"/>
+        <pc:spChg chg="add mod">
+          <ac:chgData name="Sébastien Renaud" userId="5e596eca-c704-4701-9deb-91e2038d048e" providerId="ADAL" clId="{34329023-3EC5-4071-89E2-665FADB32EB6}" dt="2026-06-30T07:13:33.966" v="2067" actId="20577"/>
           <ac:spMkLst>
             <pc:docMk/>
             <pc:sldMk cId="0" sldId="256"/>
-            <ac:spMk id="84" creationId="{F463B750-75E4-291E-BCDF-031D70BDC6D5}"/>
+            <ac:spMk id="84" creationId="{12D33092-676D-6440-72E1-8CD7908DB312}"/>
           </ac:spMkLst>
         </pc:spChg>
         <pc:spChg chg="add mod ord">
@@ -839,77 +783,101 @@
           </ac:spMkLst>
         </pc:spChg>
         <pc:spChg chg="add mod">
-          <ac:chgData name="Sébastien Renaud" userId="5e596eca-c704-4701-9deb-91e2038d048e" providerId="ADAL" clId="{34329023-3EC5-4071-89E2-665FADB32EB6}" dt="2026-06-27T20:35:38.156" v="1037" actId="552"/>
+          <ac:chgData name="Sébastien Renaud" userId="5e596eca-c704-4701-9deb-91e2038d048e" providerId="ADAL" clId="{34329023-3EC5-4071-89E2-665FADB32EB6}" dt="2026-06-30T07:12:42.093" v="2061" actId="552"/>
           <ac:spMkLst>
             <pc:docMk/>
             <pc:sldMk cId="0" sldId="256"/>
             <ac:spMk id="86" creationId="{0539739A-0650-5768-52F9-786735A65188}"/>
           </ac:spMkLst>
         </pc:spChg>
-        <pc:spChg chg="add mod ord">
-          <ac:chgData name="Sébastien Renaud" userId="5e596eca-c704-4701-9deb-91e2038d048e" providerId="ADAL" clId="{34329023-3EC5-4071-89E2-665FADB32EB6}" dt="2026-06-28T15:50:24.033" v="1593" actId="14100"/>
+        <pc:spChg chg="add del mod ord">
+          <ac:chgData name="Sébastien Renaud" userId="5e596eca-c704-4701-9deb-91e2038d048e" providerId="ADAL" clId="{34329023-3EC5-4071-89E2-665FADB32EB6}" dt="2026-06-30T07:09:55.893" v="1912" actId="478"/>
           <ac:spMkLst>
             <pc:docMk/>
             <pc:sldMk cId="0" sldId="256"/>
             <ac:spMk id="87" creationId="{47134F30-0AA6-C62C-4030-8B76455FC142}"/>
           </ac:spMkLst>
         </pc:spChg>
-        <pc:spChg chg="add del mod">
-          <ac:chgData name="Sébastien Renaud" userId="5e596eca-c704-4701-9deb-91e2038d048e" providerId="ADAL" clId="{34329023-3EC5-4071-89E2-665FADB32EB6}" dt="2026-06-27T20:33:51.886" v="904" actId="478"/>
+        <pc:spChg chg="add mod">
+          <ac:chgData name="Sébastien Renaud" userId="5e596eca-c704-4701-9deb-91e2038d048e" providerId="ADAL" clId="{34329023-3EC5-4071-89E2-665FADB32EB6}" dt="2026-06-30T07:12:49.816" v="2062" actId="552"/>
           <ac:spMkLst>
             <pc:docMk/>
             <pc:sldMk cId="0" sldId="256"/>
-            <ac:spMk id="88" creationId="{89495811-5AAB-682B-D555-1A883B5AEDC1}"/>
+            <ac:spMk id="88" creationId="{0EB966B1-52B3-3B4C-3250-34F24F0478D5}"/>
           </ac:spMkLst>
         </pc:spChg>
-        <pc:spChg chg="add mod">
-          <ac:chgData name="Sébastien Renaud" userId="5e596eca-c704-4701-9deb-91e2038d048e" providerId="ADAL" clId="{34329023-3EC5-4071-89E2-665FADB32EB6}" dt="2026-06-28T15:51:03.657" v="1619" actId="1037"/>
+        <pc:spChg chg="add del mod">
+          <ac:chgData name="Sébastien Renaud" userId="5e596eca-c704-4701-9deb-91e2038d048e" providerId="ADAL" clId="{34329023-3EC5-4071-89E2-665FADB32EB6}" dt="2026-06-30T07:09:55.893" v="1912" actId="478"/>
           <ac:spMkLst>
             <pc:docMk/>
             <pc:sldMk cId="0" sldId="256"/>
             <ac:spMk id="89" creationId="{27C4E97F-D638-5BD9-5A00-1274EA03B2F3}"/>
           </ac:spMkLst>
         </pc:spChg>
-        <pc:spChg chg="add mod ord">
-          <ac:chgData name="Sébastien Renaud" userId="5e596eca-c704-4701-9deb-91e2038d048e" providerId="ADAL" clId="{34329023-3EC5-4071-89E2-665FADB32EB6}" dt="2026-06-28T15:49:55.291" v="1591" actId="14100"/>
+        <pc:spChg chg="add del mod ord">
+          <ac:chgData name="Sébastien Renaud" userId="5e596eca-c704-4701-9deb-91e2038d048e" providerId="ADAL" clId="{34329023-3EC5-4071-89E2-665FADB32EB6}" dt="2026-06-30T07:09:55.893" v="1912" actId="478"/>
           <ac:spMkLst>
             <pc:docMk/>
             <pc:sldMk cId="0" sldId="256"/>
             <ac:spMk id="90" creationId="{6515D72B-6AFE-ADD3-9E55-4B0735D29F0B}"/>
           </ac:spMkLst>
         </pc:spChg>
-        <pc:spChg chg="add mod">
-          <ac:chgData name="Sébastien Renaud" userId="5e596eca-c704-4701-9deb-91e2038d048e" providerId="ADAL" clId="{34329023-3EC5-4071-89E2-665FADB32EB6}" dt="2026-06-28T15:49:38.872" v="1590" actId="1037"/>
+        <pc:spChg chg="add del mod">
+          <ac:chgData name="Sébastien Renaud" userId="5e596eca-c704-4701-9deb-91e2038d048e" providerId="ADAL" clId="{34329023-3EC5-4071-89E2-665FADB32EB6}" dt="2026-06-30T07:09:55.893" v="1912" actId="478"/>
           <ac:spMkLst>
             <pc:docMk/>
             <pc:sldMk cId="0" sldId="256"/>
             <ac:spMk id="91" creationId="{D441232B-E5D0-E63D-C418-0626A54E01A7}"/>
           </ac:spMkLst>
         </pc:spChg>
-        <pc:picChg chg="del">
-          <ac:chgData name="Sébastien Renaud" userId="5e596eca-c704-4701-9deb-91e2038d048e" providerId="ADAL" clId="{34329023-3EC5-4071-89E2-665FADB32EB6}" dt="2026-06-27T15:51:06.447" v="175" actId="478"/>
-          <ac:picMkLst>
+        <pc:spChg chg="add mod">
+          <ac:chgData name="Sébastien Renaud" userId="5e596eca-c704-4701-9deb-91e2038d048e" providerId="ADAL" clId="{34329023-3EC5-4071-89E2-665FADB32EB6}" dt="2026-06-30T07:12:25.853" v="2060" actId="1038"/>
+          <ac:spMkLst>
             <pc:docMk/>
             <pc:sldMk cId="0" sldId="256"/>
-            <ac:picMk id="4" creationId="{00000000-0000-0000-0000-000000000000}"/>
-          </ac:picMkLst>
-        </pc:picChg>
-        <pc:picChg chg="add del mod">
-          <ac:chgData name="Sébastien Renaud" userId="5e596eca-c704-4701-9deb-91e2038d048e" providerId="ADAL" clId="{34329023-3EC5-4071-89E2-665FADB32EB6}" dt="2026-06-28T16:19:24.208" v="1775" actId="478"/>
-          <ac:picMkLst>
+            <ac:spMk id="93" creationId="{613C75EA-8944-3FFD-AA9E-72EFD4187BA8}"/>
+          </ac:spMkLst>
+        </pc:spChg>
+        <pc:spChg chg="add mod">
+          <ac:chgData name="Sébastien Renaud" userId="5e596eca-c704-4701-9deb-91e2038d048e" providerId="ADAL" clId="{34329023-3EC5-4071-89E2-665FADB32EB6}" dt="2026-06-30T07:13:20.806" v="2065" actId="552"/>
+          <ac:spMkLst>
             <pc:docMk/>
             <pc:sldMk cId="0" sldId="256"/>
-            <ac:picMk id="15" creationId="{DF0BBFFA-86E5-A6A5-4999-D28469582DAA}"/>
-          </ac:picMkLst>
-        </pc:picChg>
-        <pc:picChg chg="del mod">
-          <ac:chgData name="Sébastien Renaud" userId="5e596eca-c704-4701-9deb-91e2038d048e" providerId="ADAL" clId="{34329023-3EC5-4071-89E2-665FADB32EB6}" dt="2026-06-27T16:00:22.828" v="271" actId="478"/>
-          <ac:picMkLst>
+            <ac:spMk id="94" creationId="{BF751DA2-6A5D-FCA1-E8FF-5F9C81AE7082}"/>
+          </ac:spMkLst>
+        </pc:spChg>
+        <pc:spChg chg="add mod">
+          <ac:chgData name="Sébastien Renaud" userId="5e596eca-c704-4701-9deb-91e2038d048e" providerId="ADAL" clId="{34329023-3EC5-4071-89E2-665FADB32EB6}" dt="2026-06-30T07:13:00.783" v="2063" actId="552"/>
+          <ac:spMkLst>
             <pc:docMk/>
             <pc:sldMk cId="0" sldId="256"/>
-            <ac:picMk id="16" creationId="{00000000-0000-0000-0000-000000000000}"/>
-          </ac:picMkLst>
-        </pc:picChg>
+            <ac:spMk id="95" creationId="{9069CBB9-2623-5690-574E-823087C0E0D0}"/>
+          </ac:spMkLst>
+        </pc:spChg>
+        <pc:spChg chg="add mod">
+          <ac:chgData name="Sébastien Renaud" userId="5e596eca-c704-4701-9deb-91e2038d048e" providerId="ADAL" clId="{34329023-3EC5-4071-89E2-665FADB32EB6}" dt="2026-06-30T07:13:10.329" v="2064" actId="552"/>
+          <ac:spMkLst>
+            <pc:docMk/>
+            <pc:sldMk cId="0" sldId="256"/>
+            <ac:spMk id="96" creationId="{DB199D4D-68BD-CFAD-126F-0BDD6D10BE2E}"/>
+          </ac:spMkLst>
+        </pc:spChg>
+        <pc:spChg chg="add mod">
+          <ac:chgData name="Sébastien Renaud" userId="5e596eca-c704-4701-9deb-91e2038d048e" providerId="ADAL" clId="{34329023-3EC5-4071-89E2-665FADB32EB6}" dt="2026-06-30T07:13:00.783" v="2063" actId="552"/>
+          <ac:spMkLst>
+            <pc:docMk/>
+            <pc:sldMk cId="0" sldId="256"/>
+            <ac:spMk id="97" creationId="{341937E3-5BFB-5630-B8AE-6E7CEF7E7F5F}"/>
+          </ac:spMkLst>
+        </pc:spChg>
+        <pc:spChg chg="add mod">
+          <ac:chgData name="Sébastien Renaud" userId="5e596eca-c704-4701-9deb-91e2038d048e" providerId="ADAL" clId="{34329023-3EC5-4071-89E2-665FADB32EB6}" dt="2026-06-30T07:13:10.329" v="2064" actId="552"/>
+          <ac:spMkLst>
+            <pc:docMk/>
+            <pc:sldMk cId="0" sldId="256"/>
+            <ac:spMk id="98" creationId="{316E784F-0697-F314-A17F-059B28830A80}"/>
+          </ac:spMkLst>
+        </pc:spChg>
         <pc:picChg chg="add mod">
           <ac:chgData name="Sébastien Renaud" userId="5e596eca-c704-4701-9deb-91e2038d048e" providerId="ADAL" clId="{34329023-3EC5-4071-89E2-665FADB32EB6}" dt="2026-06-28T16:19:29.485" v="1776"/>
           <ac:picMkLst>
@@ -941,179 +909,12 @@
           <pc:docMk/>
           <pc:sldMk cId="0" sldId="257"/>
         </pc:sldMkLst>
-        <pc:spChg chg="add del">
-          <ac:chgData name="Sébastien Renaud" userId="5e596eca-c704-4701-9deb-91e2038d048e" providerId="ADAL" clId="{34329023-3EC5-4071-89E2-665FADB32EB6}" dt="2026-06-27T20:42:17.919" v="1127" actId="478"/>
-          <ac:spMkLst>
-            <pc:docMk/>
-            <pc:sldMk cId="0" sldId="257"/>
-            <ac:spMk id="2" creationId="{00000000-0000-0000-0000-000000000000}"/>
-          </ac:spMkLst>
-        </pc:spChg>
-        <pc:spChg chg="add del">
-          <ac:chgData name="Sébastien Renaud" userId="5e596eca-c704-4701-9deb-91e2038d048e" providerId="ADAL" clId="{34329023-3EC5-4071-89E2-665FADB32EB6}" dt="2026-06-27T20:41:51.206" v="1121" actId="478"/>
-          <ac:spMkLst>
-            <pc:docMk/>
-            <pc:sldMk cId="0" sldId="257"/>
-            <ac:spMk id="3" creationId="{00000000-0000-0000-0000-000000000000}"/>
-          </ac:spMkLst>
-        </pc:spChg>
-        <pc:spChg chg="del">
-          <ac:chgData name="Sébastien Renaud" userId="5e596eca-c704-4701-9deb-91e2038d048e" providerId="ADAL" clId="{34329023-3EC5-4071-89E2-665FADB32EB6}" dt="2026-06-27T20:42:09.711" v="1126" actId="478"/>
-          <ac:spMkLst>
-            <pc:docMk/>
-            <pc:sldMk cId="0" sldId="257"/>
-            <ac:spMk id="5" creationId="{00000000-0000-0000-0000-000000000000}"/>
-          </ac:spMkLst>
-        </pc:spChg>
-        <pc:spChg chg="del">
-          <ac:chgData name="Sébastien Renaud" userId="5e596eca-c704-4701-9deb-91e2038d048e" providerId="ADAL" clId="{34329023-3EC5-4071-89E2-665FADB32EB6}" dt="2026-06-27T20:42:07.410" v="1125" actId="478"/>
-          <ac:spMkLst>
-            <pc:docMk/>
-            <pc:sldMk cId="0" sldId="257"/>
-            <ac:spMk id="6" creationId="{00000000-0000-0000-0000-000000000000}"/>
-          </ac:spMkLst>
-        </pc:spChg>
-        <pc:spChg chg="del">
-          <ac:chgData name="Sébastien Renaud" userId="5e596eca-c704-4701-9deb-91e2038d048e" providerId="ADAL" clId="{34329023-3EC5-4071-89E2-665FADB32EB6}" dt="2026-06-27T20:41:58.932" v="1123" actId="478"/>
-          <ac:spMkLst>
-            <pc:docMk/>
-            <pc:sldMk cId="0" sldId="257"/>
-            <ac:spMk id="7" creationId="{00000000-0000-0000-0000-000000000000}"/>
-          </ac:spMkLst>
-        </pc:spChg>
-        <pc:spChg chg="del">
-          <ac:chgData name="Sébastien Renaud" userId="5e596eca-c704-4701-9deb-91e2038d048e" providerId="ADAL" clId="{34329023-3EC5-4071-89E2-665FADB32EB6}" dt="2026-06-27T20:41:54.515" v="1122" actId="478"/>
-          <ac:spMkLst>
-            <pc:docMk/>
-            <pc:sldMk cId="0" sldId="257"/>
-            <ac:spMk id="8" creationId="{00000000-0000-0000-0000-000000000000}"/>
-          </ac:spMkLst>
-        </pc:spChg>
-        <pc:spChg chg="del">
-          <ac:chgData name="Sébastien Renaud" userId="5e596eca-c704-4701-9deb-91e2038d048e" providerId="ADAL" clId="{34329023-3EC5-4071-89E2-665FADB32EB6}" dt="2026-06-27T20:42:27.385" v="1129" actId="478"/>
-          <ac:spMkLst>
-            <pc:docMk/>
-            <pc:sldMk cId="0" sldId="257"/>
-            <ac:spMk id="57" creationId="{00000000-0000-0000-0000-000000000000}"/>
-          </ac:spMkLst>
-        </pc:spChg>
-        <pc:spChg chg="del">
-          <ac:chgData name="Sébastien Renaud" userId="5e596eca-c704-4701-9deb-91e2038d048e" providerId="ADAL" clId="{34329023-3EC5-4071-89E2-665FADB32EB6}" dt="2026-06-27T20:42:27.385" v="1129" actId="478"/>
-          <ac:spMkLst>
-            <pc:docMk/>
-            <pc:sldMk cId="0" sldId="257"/>
-            <ac:spMk id="58" creationId="{00000000-0000-0000-0000-000000000000}"/>
-          </ac:spMkLst>
-        </pc:spChg>
-        <pc:spChg chg="del">
-          <ac:chgData name="Sébastien Renaud" userId="5e596eca-c704-4701-9deb-91e2038d048e" providerId="ADAL" clId="{34329023-3EC5-4071-89E2-665FADB32EB6}" dt="2026-06-27T20:42:27.385" v="1129" actId="478"/>
-          <ac:spMkLst>
-            <pc:docMk/>
-            <pc:sldMk cId="0" sldId="257"/>
-            <ac:spMk id="59" creationId="{00000000-0000-0000-0000-000000000000}"/>
-          </ac:spMkLst>
-        </pc:spChg>
-        <pc:spChg chg="del">
-          <ac:chgData name="Sébastien Renaud" userId="5e596eca-c704-4701-9deb-91e2038d048e" providerId="ADAL" clId="{34329023-3EC5-4071-89E2-665FADB32EB6}" dt="2026-06-27T20:42:27.385" v="1129" actId="478"/>
-          <ac:spMkLst>
-            <pc:docMk/>
-            <pc:sldMk cId="0" sldId="257"/>
-            <ac:spMk id="60" creationId="{00000000-0000-0000-0000-000000000000}"/>
-          </ac:spMkLst>
-        </pc:spChg>
         <pc:spChg chg="add mod">
           <ac:chgData name="Sébastien Renaud" userId="5e596eca-c704-4701-9deb-91e2038d048e" providerId="ADAL" clId="{34329023-3EC5-4071-89E2-665FADB32EB6}" dt="2026-06-27T20:42:18.374" v="1128"/>
           <ac:spMkLst>
             <pc:docMk/>
             <pc:sldMk cId="0" sldId="257"/>
             <ac:spMk id="61" creationId="{E632B3E1-3C2A-6164-BA39-4045FA160F54}"/>
-          </ac:spMkLst>
-        </pc:spChg>
-        <pc:picChg chg="del">
-          <ac:chgData name="Sébastien Renaud" userId="5e596eca-c704-4701-9deb-91e2038d048e" providerId="ADAL" clId="{34329023-3EC5-4071-89E2-665FADB32EB6}" dt="2026-06-27T20:42:03.739" v="1124" actId="478"/>
-          <ac:picMkLst>
-            <pc:docMk/>
-            <pc:sldMk cId="0" sldId="257"/>
-            <ac:picMk id="4" creationId="{00000000-0000-0000-0000-000000000000}"/>
-          </ac:picMkLst>
-        </pc:picChg>
-      </pc:sldChg>
-      <pc:sldChg chg="modSp add del mod">
-        <pc:chgData name="Sébastien Renaud" userId="5e596eca-c704-4701-9deb-91e2038d048e" providerId="ADAL" clId="{34329023-3EC5-4071-89E2-665FADB32EB6}" dt="2026-06-28T16:18:55.877" v="1762" actId="47"/>
-        <pc:sldMkLst>
-          <pc:docMk/>
-          <pc:sldMk cId="0" sldId="258"/>
-        </pc:sldMkLst>
-        <pc:spChg chg="mod">
-          <ac:chgData name="Sébastien Renaud" userId="5e596eca-c704-4701-9deb-91e2038d048e" providerId="ADAL" clId="{34329023-3EC5-4071-89E2-665FADB32EB6}" dt="2026-06-28T15:06:14.628" v="1354" actId="27636"/>
-          <ac:spMkLst>
-            <pc:docMk/>
-            <pc:sldMk cId="0" sldId="258"/>
-            <ac:spMk id="5" creationId="{00000000-0000-0000-0000-000000000000}"/>
-          </ac:spMkLst>
-        </pc:spChg>
-        <pc:spChg chg="mod">
-          <ac:chgData name="Sébastien Renaud" userId="5e596eca-c704-4701-9deb-91e2038d048e" providerId="ADAL" clId="{34329023-3EC5-4071-89E2-665FADB32EB6}" dt="2026-06-28T15:06:14.628" v="1353" actId="27636"/>
-          <ac:spMkLst>
-            <pc:docMk/>
-            <pc:sldMk cId="0" sldId="258"/>
-            <ac:spMk id="6" creationId="{00000000-0000-0000-0000-000000000000}"/>
-          </ac:spMkLst>
-        </pc:spChg>
-        <pc:spChg chg="mod">
-          <ac:chgData name="Sébastien Renaud" userId="5e596eca-c704-4701-9deb-91e2038d048e" providerId="ADAL" clId="{34329023-3EC5-4071-89E2-665FADB32EB6}" dt="2026-06-28T15:06:14.643" v="1356" actId="27636"/>
-          <ac:spMkLst>
-            <pc:docMk/>
-            <pc:sldMk cId="0" sldId="258"/>
-            <ac:spMk id="8" creationId="{00000000-0000-0000-0000-000000000000}"/>
-          </ac:spMkLst>
-        </pc:spChg>
-        <pc:spChg chg="mod">
-          <ac:chgData name="Sébastien Renaud" userId="5e596eca-c704-4701-9deb-91e2038d048e" providerId="ADAL" clId="{34329023-3EC5-4071-89E2-665FADB32EB6}" dt="2026-06-28T15:06:14.643" v="1358" actId="27636"/>
-          <ac:spMkLst>
-            <pc:docMk/>
-            <pc:sldMk cId="0" sldId="258"/>
-            <ac:spMk id="9" creationId="{00000000-0000-0000-0000-000000000000}"/>
-          </ac:spMkLst>
-        </pc:spChg>
-        <pc:spChg chg="mod">
-          <ac:chgData name="Sébastien Renaud" userId="5e596eca-c704-4701-9deb-91e2038d048e" providerId="ADAL" clId="{34329023-3EC5-4071-89E2-665FADB32EB6}" dt="2026-06-28T15:06:14.628" v="1352" actId="27636"/>
-          <ac:spMkLst>
-            <pc:docMk/>
-            <pc:sldMk cId="0" sldId="258"/>
-            <ac:spMk id="10" creationId="{00000000-0000-0000-0000-000000000000}"/>
-          </ac:spMkLst>
-        </pc:spChg>
-        <pc:spChg chg="mod">
-          <ac:chgData name="Sébastien Renaud" userId="5e596eca-c704-4701-9deb-91e2038d048e" providerId="ADAL" clId="{34329023-3EC5-4071-89E2-665FADB32EB6}" dt="2026-06-28T15:06:14.643" v="1359" actId="27636"/>
-          <ac:spMkLst>
-            <pc:docMk/>
-            <pc:sldMk cId="0" sldId="258"/>
-            <ac:spMk id="11" creationId="{00000000-0000-0000-0000-000000000000}"/>
-          </ac:spMkLst>
-        </pc:spChg>
-        <pc:spChg chg="mod">
-          <ac:chgData name="Sébastien Renaud" userId="5e596eca-c704-4701-9deb-91e2038d048e" providerId="ADAL" clId="{34329023-3EC5-4071-89E2-665FADB32EB6}" dt="2026-06-28T15:06:14.643" v="1357" actId="27636"/>
-          <ac:spMkLst>
-            <pc:docMk/>
-            <pc:sldMk cId="0" sldId="258"/>
-            <ac:spMk id="14" creationId="{00000000-0000-0000-0000-000000000000}"/>
-          </ac:spMkLst>
-        </pc:spChg>
-        <pc:spChg chg="mod">
-          <ac:chgData name="Sébastien Renaud" userId="5e596eca-c704-4701-9deb-91e2038d048e" providerId="ADAL" clId="{34329023-3EC5-4071-89E2-665FADB32EB6}" dt="2026-06-28T15:06:14.628" v="1351" actId="27636"/>
-          <ac:spMkLst>
-            <pc:docMk/>
-            <pc:sldMk cId="0" sldId="258"/>
-            <ac:spMk id="17" creationId="{00000000-0000-0000-0000-000000000000}"/>
-          </ac:spMkLst>
-        </pc:spChg>
-        <pc:spChg chg="mod">
-          <ac:chgData name="Sébastien Renaud" userId="5e596eca-c704-4701-9deb-91e2038d048e" providerId="ADAL" clId="{34329023-3EC5-4071-89E2-665FADB32EB6}" dt="2026-06-28T15:06:14.628" v="1355" actId="27636"/>
-          <ac:spMkLst>
-            <pc:docMk/>
-            <pc:sldMk cId="0" sldId="258"/>
-            <ac:spMk id="21" creationId="{00000000-0000-0000-0000-000000000000}"/>
           </ac:spMkLst>
         </pc:spChg>
       </pc:sldChg>
@@ -1123,54 +924,6 @@
           <pc:docMk/>
           <pc:sldMk cId="0" sldId="261"/>
         </pc:sldMkLst>
-        <pc:spChg chg="del">
-          <ac:chgData name="Sébastien Renaud" userId="5e596eca-c704-4701-9deb-91e2038d048e" providerId="ADAL" clId="{34329023-3EC5-4071-89E2-665FADB32EB6}" dt="2026-06-28T15:32:20.764" v="1395" actId="478"/>
-          <ac:spMkLst>
-            <pc:docMk/>
-            <pc:sldMk cId="0" sldId="261"/>
-            <ac:spMk id="2" creationId="{00000000-0000-0000-0000-000000000000}"/>
-          </ac:spMkLst>
-        </pc:spChg>
-        <pc:spChg chg="del">
-          <ac:chgData name="Sébastien Renaud" userId="5e596eca-c704-4701-9deb-91e2038d048e" providerId="ADAL" clId="{34329023-3EC5-4071-89E2-665FADB32EB6}" dt="2026-06-28T15:32:37.809" v="1402" actId="478"/>
-          <ac:spMkLst>
-            <pc:docMk/>
-            <pc:sldMk cId="0" sldId="261"/>
-            <ac:spMk id="3" creationId="{00000000-0000-0000-0000-000000000000}"/>
-          </ac:spMkLst>
-        </pc:spChg>
-        <pc:spChg chg="del">
-          <ac:chgData name="Sébastien Renaud" userId="5e596eca-c704-4701-9deb-91e2038d048e" providerId="ADAL" clId="{34329023-3EC5-4071-89E2-665FADB32EB6}" dt="2026-06-28T15:32:31.880" v="1398" actId="478"/>
-          <ac:spMkLst>
-            <pc:docMk/>
-            <pc:sldMk cId="0" sldId="261"/>
-            <ac:spMk id="5" creationId="{00000000-0000-0000-0000-000000000000}"/>
-          </ac:spMkLst>
-        </pc:spChg>
-        <pc:spChg chg="del">
-          <ac:chgData name="Sébastien Renaud" userId="5e596eca-c704-4701-9deb-91e2038d048e" providerId="ADAL" clId="{34329023-3EC5-4071-89E2-665FADB32EB6}" dt="2026-06-28T15:32:29.506" v="1397" actId="478"/>
-          <ac:spMkLst>
-            <pc:docMk/>
-            <pc:sldMk cId="0" sldId="261"/>
-            <ac:spMk id="6" creationId="{00000000-0000-0000-0000-000000000000}"/>
-          </ac:spMkLst>
-        </pc:spChg>
-        <pc:spChg chg="del">
-          <ac:chgData name="Sébastien Renaud" userId="5e596eca-c704-4701-9deb-91e2038d048e" providerId="ADAL" clId="{34329023-3EC5-4071-89E2-665FADB32EB6}" dt="2026-06-28T15:32:33.883" v="1399" actId="478"/>
-          <ac:spMkLst>
-            <pc:docMk/>
-            <pc:sldMk cId="0" sldId="261"/>
-            <ac:spMk id="7" creationId="{00000000-0000-0000-0000-000000000000}"/>
-          </ac:spMkLst>
-        </pc:spChg>
-        <pc:spChg chg="del mod">
-          <ac:chgData name="Sébastien Renaud" userId="5e596eca-c704-4701-9deb-91e2038d048e" providerId="ADAL" clId="{34329023-3EC5-4071-89E2-665FADB32EB6}" dt="2026-06-28T15:32:36.805" v="1401" actId="478"/>
-          <ac:spMkLst>
-            <pc:docMk/>
-            <pc:sldMk cId="0" sldId="261"/>
-            <ac:spMk id="8" creationId="{00000000-0000-0000-0000-000000000000}"/>
-          </ac:spMkLst>
-        </pc:spChg>
         <pc:spChg chg="mod">
           <ac:chgData name="Sébastien Renaud" userId="5e596eca-c704-4701-9deb-91e2038d048e" providerId="ADAL" clId="{34329023-3EC5-4071-89E2-665FADB32EB6}" dt="2026-06-28T15:33:02.556" v="1426" actId="1038"/>
           <ac:spMkLst>
@@ -1347,44 +1100,12 @@
             <ac:spMk id="40" creationId="{00000000-0000-0000-0000-000000000000}"/>
           </ac:spMkLst>
         </pc:spChg>
-        <pc:spChg chg="del">
-          <ac:chgData name="Sébastien Renaud" userId="5e596eca-c704-4701-9deb-91e2038d048e" providerId="ADAL" clId="{34329023-3EC5-4071-89E2-665FADB32EB6}" dt="2026-06-28T15:31:45.283" v="1389" actId="478"/>
-          <ac:spMkLst>
-            <pc:docMk/>
-            <pc:sldMk cId="0" sldId="261"/>
-            <ac:spMk id="41" creationId="{00000000-0000-0000-0000-000000000000}"/>
-          </ac:spMkLst>
-        </pc:spChg>
         <pc:spChg chg="mod">
           <ac:chgData name="Sébastien Renaud" userId="5e596eca-c704-4701-9deb-91e2038d048e" providerId="ADAL" clId="{34329023-3EC5-4071-89E2-665FADB32EB6}" dt="2026-06-28T15:36:08.560" v="1494" actId="14100"/>
           <ac:spMkLst>
             <pc:docMk/>
             <pc:sldMk cId="0" sldId="261"/>
             <ac:spMk id="42" creationId="{00000000-0000-0000-0000-000000000000}"/>
-          </ac:spMkLst>
-        </pc:spChg>
-        <pc:spChg chg="del">
-          <ac:chgData name="Sébastien Renaud" userId="5e596eca-c704-4701-9deb-91e2038d048e" providerId="ADAL" clId="{34329023-3EC5-4071-89E2-665FADB32EB6}" dt="2026-06-28T15:35:56.211" v="1491" actId="478"/>
-          <ac:spMkLst>
-            <pc:docMk/>
-            <pc:sldMk cId="0" sldId="261"/>
-            <ac:spMk id="43" creationId="{00000000-0000-0000-0000-000000000000}"/>
-          </ac:spMkLst>
-        </pc:spChg>
-        <pc:spChg chg="del">
-          <ac:chgData name="Sébastien Renaud" userId="5e596eca-c704-4701-9deb-91e2038d048e" providerId="ADAL" clId="{34329023-3EC5-4071-89E2-665FADB32EB6}" dt="2026-06-28T15:31:51.614" v="1391" actId="478"/>
-          <ac:spMkLst>
-            <pc:docMk/>
-            <pc:sldMk cId="0" sldId="261"/>
-            <ac:spMk id="44" creationId="{00000000-0000-0000-0000-000000000000}"/>
-          </ac:spMkLst>
-        </pc:spChg>
-        <pc:spChg chg="del mod">
-          <ac:chgData name="Sébastien Renaud" userId="5e596eca-c704-4701-9deb-91e2038d048e" providerId="ADAL" clId="{34329023-3EC5-4071-89E2-665FADB32EB6}" dt="2026-06-28T15:35:59.211" v="1492" actId="478"/>
-          <ac:spMkLst>
-            <pc:docMk/>
-            <pc:sldMk cId="0" sldId="261"/>
-            <ac:spMk id="45" creationId="{00000000-0000-0000-0000-000000000000}"/>
           </ac:spMkLst>
         </pc:spChg>
         <pc:spChg chg="add mod ord">
@@ -1403,14 +1124,6 @@
             <ac:spMk id="50" creationId="{DFB037CE-72AA-7A36-621F-F4951349DED1}"/>
           </ac:spMkLst>
         </pc:spChg>
-        <pc:picChg chg="del">
-          <ac:chgData name="Sébastien Renaud" userId="5e596eca-c704-4701-9deb-91e2038d048e" providerId="ADAL" clId="{34329023-3EC5-4071-89E2-665FADB32EB6}" dt="2026-06-28T15:32:28.014" v="1396" actId="478"/>
-          <ac:picMkLst>
-            <pc:docMk/>
-            <pc:sldMk cId="0" sldId="261"/>
-            <ac:picMk id="4" creationId="{00000000-0000-0000-0000-000000000000}"/>
-          </ac:picMkLst>
-        </pc:picChg>
         <pc:picChg chg="add mod">
           <ac:chgData name="Sébastien Renaud" userId="5e596eca-c704-4701-9deb-91e2038d048e" providerId="ADAL" clId="{34329023-3EC5-4071-89E2-665FADB32EB6}" dt="2026-06-28T15:35:52.112" v="1490" actId="1076"/>
           <ac:picMkLst>
@@ -1427,14 +1140,6 @@
             <ac:picMk id="48" creationId="{CAD59685-818A-B88E-79A9-24A3E9BD2BB9}"/>
           </ac:picMkLst>
         </pc:picChg>
-        <pc:picChg chg="add del mod">
-          <ac:chgData name="Sébastien Renaud" userId="5e596eca-c704-4701-9deb-91e2038d048e" providerId="ADAL" clId="{34329023-3EC5-4071-89E2-665FADB32EB6}" dt="2026-06-28T15:41:33.117" v="1501" actId="478"/>
-          <ac:picMkLst>
-            <pc:docMk/>
-            <pc:sldMk cId="0" sldId="261"/>
-            <ac:picMk id="49" creationId="{EBF85B01-F6AC-8FF1-6CDA-B3CA6DA9A558}"/>
-          </ac:picMkLst>
-        </pc:picChg>
         <pc:picChg chg="add mod">
           <ac:chgData name="Sébastien Renaud" userId="5e596eca-c704-4701-9deb-91e2038d048e" providerId="ADAL" clId="{34329023-3EC5-4071-89E2-665FADB32EB6}" dt="2026-06-28T15:42:02.926" v="1508" actId="1076"/>
           <ac:picMkLst>
@@ -1443,123 +1148,6 @@
             <ac:picMk id="51" creationId="{22041930-135D-E894-1CFD-55DD2730FC36}"/>
           </ac:picMkLst>
         </pc:picChg>
-      </pc:sldChg>
-      <pc:sldChg chg="addSp delSp modSp add del mod setBg">
-        <pc:chgData name="Sébastien Renaud" userId="5e596eca-c704-4701-9deb-91e2038d048e" providerId="ADAL" clId="{34329023-3EC5-4071-89E2-665FADB32EB6}" dt="2026-06-28T15:27:18.083" v="1380" actId="47"/>
-        <pc:sldMkLst>
-          <pc:docMk/>
-          <pc:sldMk cId="0" sldId="262"/>
-        </pc:sldMkLst>
-        <pc:spChg chg="del">
-          <ac:chgData name="Sébastien Renaud" userId="5e596eca-c704-4701-9deb-91e2038d048e" providerId="ADAL" clId="{34329023-3EC5-4071-89E2-665FADB32EB6}" dt="2026-06-28T15:08:01.992" v="1361" actId="478"/>
-          <ac:spMkLst>
-            <pc:docMk/>
-            <pc:sldMk cId="0" sldId="262"/>
-            <ac:spMk id="2" creationId="{00000000-0000-0000-0000-000000000000}"/>
-          </ac:spMkLst>
-        </pc:spChg>
-        <pc:spChg chg="del">
-          <ac:chgData name="Sébastien Renaud" userId="5e596eca-c704-4701-9deb-91e2038d048e" providerId="ADAL" clId="{34329023-3EC5-4071-89E2-665FADB32EB6}" dt="2026-06-28T15:08:21.959" v="1365" actId="478"/>
-          <ac:spMkLst>
-            <pc:docMk/>
-            <pc:sldMk cId="0" sldId="262"/>
-            <ac:spMk id="3" creationId="{00000000-0000-0000-0000-000000000000}"/>
-          </ac:spMkLst>
-        </pc:spChg>
-        <pc:spChg chg="del">
-          <ac:chgData name="Sébastien Renaud" userId="5e596eca-c704-4701-9deb-91e2038d048e" providerId="ADAL" clId="{34329023-3EC5-4071-89E2-665FADB32EB6}" dt="2026-06-28T15:08:06.333" v="1362" actId="478"/>
-          <ac:spMkLst>
-            <pc:docMk/>
-            <pc:sldMk cId="0" sldId="262"/>
-            <ac:spMk id="5" creationId="{00000000-0000-0000-0000-000000000000}"/>
-          </ac:spMkLst>
-        </pc:spChg>
-        <pc:spChg chg="del">
-          <ac:chgData name="Sébastien Renaud" userId="5e596eca-c704-4701-9deb-91e2038d048e" providerId="ADAL" clId="{34329023-3EC5-4071-89E2-665FADB32EB6}" dt="2026-06-28T15:08:08.053" v="1363" actId="478"/>
-          <ac:spMkLst>
-            <pc:docMk/>
-            <pc:sldMk cId="0" sldId="262"/>
-            <ac:spMk id="6" creationId="{00000000-0000-0000-0000-000000000000}"/>
-          </ac:spMkLst>
-        </pc:spChg>
-        <pc:spChg chg="mod">
-          <ac:chgData name="Sébastien Renaud" userId="5e596eca-c704-4701-9deb-91e2038d048e" providerId="ADAL" clId="{34329023-3EC5-4071-89E2-665FADB32EB6}" dt="2026-06-28T15:08:56.721" v="1369" actId="1076"/>
-          <ac:spMkLst>
-            <pc:docMk/>
-            <pc:sldMk cId="0" sldId="262"/>
-            <ac:spMk id="7" creationId="{00000000-0000-0000-0000-000000000000}"/>
-          </ac:spMkLst>
-        </pc:spChg>
-        <pc:spChg chg="mod">
-          <ac:chgData name="Sébastien Renaud" userId="5e596eca-c704-4701-9deb-91e2038d048e" providerId="ADAL" clId="{34329023-3EC5-4071-89E2-665FADB32EB6}" dt="2026-06-28T15:09:39.820" v="1374" actId="14100"/>
-          <ac:spMkLst>
-            <pc:docMk/>
-            <pc:sldMk cId="0" sldId="262"/>
-            <ac:spMk id="8" creationId="{00000000-0000-0000-0000-000000000000}"/>
-          </ac:spMkLst>
-        </pc:spChg>
-        <pc:spChg chg="del">
-          <ac:chgData name="Sébastien Renaud" userId="5e596eca-c704-4701-9deb-91e2038d048e" providerId="ADAL" clId="{34329023-3EC5-4071-89E2-665FADB32EB6}" dt="2026-06-28T15:10:16.991" v="1376" actId="478"/>
-          <ac:spMkLst>
-            <pc:docMk/>
-            <pc:sldMk cId="0" sldId="262"/>
-            <ac:spMk id="28" creationId="{00000000-0000-0000-0000-000000000000}"/>
-          </ac:spMkLst>
-        </pc:spChg>
-        <pc:spChg chg="del">
-          <ac:chgData name="Sébastien Renaud" userId="5e596eca-c704-4701-9deb-91e2038d048e" providerId="ADAL" clId="{34329023-3EC5-4071-89E2-665FADB32EB6}" dt="2026-06-28T15:10:19.748" v="1378" actId="478"/>
-          <ac:spMkLst>
-            <pc:docMk/>
-            <pc:sldMk cId="0" sldId="262"/>
-            <ac:spMk id="29" creationId="{00000000-0000-0000-0000-000000000000}"/>
-          </ac:spMkLst>
-        </pc:spChg>
-        <pc:spChg chg="del">
-          <ac:chgData name="Sébastien Renaud" userId="5e596eca-c704-4701-9deb-91e2038d048e" providerId="ADAL" clId="{34329023-3EC5-4071-89E2-665FADB32EB6}" dt="2026-06-28T15:10:15.807" v="1375" actId="478"/>
-          <ac:spMkLst>
-            <pc:docMk/>
-            <pc:sldMk cId="0" sldId="262"/>
-            <ac:spMk id="30" creationId="{00000000-0000-0000-0000-000000000000}"/>
-          </ac:spMkLst>
-        </pc:spChg>
-        <pc:spChg chg="del">
-          <ac:chgData name="Sébastien Renaud" userId="5e596eca-c704-4701-9deb-91e2038d048e" providerId="ADAL" clId="{34329023-3EC5-4071-89E2-665FADB32EB6}" dt="2026-06-28T15:10:18.983" v="1377" actId="478"/>
-          <ac:spMkLst>
-            <pc:docMk/>
-            <pc:sldMk cId="0" sldId="262"/>
-            <ac:spMk id="31" creationId="{00000000-0000-0000-0000-000000000000}"/>
-          </ac:spMkLst>
-        </pc:spChg>
-        <pc:spChg chg="add mod ord">
-          <ac:chgData name="Sébastien Renaud" userId="5e596eca-c704-4701-9deb-91e2038d048e" providerId="ADAL" clId="{34329023-3EC5-4071-89E2-665FADB32EB6}" dt="2026-06-28T15:08:29.530" v="1366" actId="167"/>
-          <ac:spMkLst>
-            <pc:docMk/>
-            <pc:sldMk cId="0" sldId="262"/>
-            <ac:spMk id="32" creationId="{D0B5A400-7048-DB6B-ADE3-F183DE2810BD}"/>
-          </ac:spMkLst>
-        </pc:spChg>
-        <pc:picChg chg="del">
-          <ac:chgData name="Sébastien Renaud" userId="5e596eca-c704-4701-9deb-91e2038d048e" providerId="ADAL" clId="{34329023-3EC5-4071-89E2-665FADB32EB6}" dt="2026-06-28T15:07:56.312" v="1360" actId="478"/>
-          <ac:picMkLst>
-            <pc:docMk/>
-            <pc:sldMk cId="0" sldId="262"/>
-            <ac:picMk id="4" creationId="{00000000-0000-0000-0000-000000000000}"/>
-          </ac:picMkLst>
-        </pc:picChg>
-      </pc:sldChg>
-      <pc:sldChg chg="del">
-        <pc:chgData name="Sébastien Renaud" userId="5e596eca-c704-4701-9deb-91e2038d048e" providerId="ADAL" clId="{34329023-3EC5-4071-89E2-665FADB32EB6}" dt="2026-06-28T16:18:58.318" v="1769" actId="47"/>
-        <pc:sldMkLst>
-          <pc:docMk/>
-          <pc:sldMk cId="2927129303" sldId="268"/>
-        </pc:sldMkLst>
-      </pc:sldChg>
-      <pc:sldChg chg="del">
-        <pc:chgData name="Sébastien Renaud" userId="5e596eca-c704-4701-9deb-91e2038d048e" providerId="ADAL" clId="{34329023-3EC5-4071-89E2-665FADB32EB6}" dt="2026-06-28T16:18:57.963" v="1768" actId="47"/>
-        <pc:sldMkLst>
-          <pc:docMk/>
-          <pc:sldMk cId="3976424965" sldId="269"/>
-        </pc:sldMkLst>
       </pc:sldChg>
       <pc:sldChg chg="modSp mod">
         <pc:chgData name="Sébastien Renaud" userId="5e596eca-c704-4701-9deb-91e2038d048e" providerId="ADAL" clId="{34329023-3EC5-4071-89E2-665FADB32EB6}" dt="2026-06-27T15:24:22.692" v="34" actId="404"/>
@@ -1582,68 +1170,12 @@
           <pc:docMk/>
           <pc:sldMk cId="4273313417" sldId="271"/>
         </pc:sldMkLst>
-        <pc:spChg chg="del">
-          <ac:chgData name="Sébastien Renaud" userId="5e596eca-c704-4701-9deb-91e2038d048e" providerId="ADAL" clId="{34329023-3EC5-4071-89E2-665FADB32EB6}" dt="2026-06-27T15:26:18.239" v="41" actId="478"/>
-          <ac:spMkLst>
-            <pc:docMk/>
-            <pc:sldMk cId="4273313417" sldId="271"/>
-            <ac:spMk id="2" creationId="{7908FD19-CDF3-38DD-A797-531846A7DA65}"/>
-          </ac:spMkLst>
-        </pc:spChg>
-        <pc:spChg chg="add del mod">
-          <ac:chgData name="Sébastien Renaud" userId="5e596eca-c704-4701-9deb-91e2038d048e" providerId="ADAL" clId="{34329023-3EC5-4071-89E2-665FADB32EB6}" dt="2026-06-28T14:54:08.798" v="1347" actId="478"/>
-          <ac:spMkLst>
-            <pc:docMk/>
-            <pc:sldMk cId="4273313417" sldId="271"/>
-            <ac:spMk id="2" creationId="{8C8823AD-16E2-4273-ADA0-8C5A2B43B2DA}"/>
-          </ac:spMkLst>
-        </pc:spChg>
-        <pc:spChg chg="del mod">
-          <ac:chgData name="Sébastien Renaud" userId="5e596eca-c704-4701-9deb-91e2038d048e" providerId="ADAL" clId="{34329023-3EC5-4071-89E2-665FADB32EB6}" dt="2026-06-28T16:11:33.061" v="1757" actId="478"/>
-          <ac:spMkLst>
-            <pc:docMk/>
-            <pc:sldMk cId="4273313417" sldId="271"/>
-            <ac:spMk id="3" creationId="{30A6FDAC-BC8D-E298-5BAD-81A0CB4A9730}"/>
-          </ac:spMkLst>
-        </pc:spChg>
-        <pc:spChg chg="add del mod">
-          <ac:chgData name="Sébastien Renaud" userId="5e596eca-c704-4701-9deb-91e2038d048e" providerId="ADAL" clId="{34329023-3EC5-4071-89E2-665FADB32EB6}" dt="2026-06-28T14:54:04.709" v="1345" actId="478"/>
-          <ac:spMkLst>
-            <pc:docMk/>
-            <pc:sldMk cId="4273313417" sldId="271"/>
-            <ac:spMk id="4" creationId="{02105E82-1215-2DB0-47E6-B3ABEED34572}"/>
-          </ac:spMkLst>
-        </pc:spChg>
-        <pc:spChg chg="del mod">
-          <ac:chgData name="Sébastien Renaud" userId="5e596eca-c704-4701-9deb-91e2038d048e" providerId="ADAL" clId="{34329023-3EC5-4071-89E2-665FADB32EB6}" dt="2026-06-27T15:35:05.208" v="161" actId="478"/>
-          <ac:spMkLst>
-            <pc:docMk/>
-            <pc:sldMk cId="4273313417" sldId="271"/>
-            <ac:spMk id="4" creationId="{7D6B3301-0CEF-CE3E-D0D8-090AA55F580C}"/>
-          </ac:spMkLst>
-        </pc:spChg>
         <pc:spChg chg="add mod">
           <ac:chgData name="Sébastien Renaud" userId="5e596eca-c704-4701-9deb-91e2038d048e" providerId="ADAL" clId="{34329023-3EC5-4071-89E2-665FADB32EB6}" dt="2026-06-28T16:11:53.502" v="1760" actId="552"/>
           <ac:spMkLst>
             <pc:docMk/>
             <pc:sldMk cId="4273313417" sldId="271"/>
             <ac:spMk id="6" creationId="{318E6845-C47F-F898-57FD-288C3C9C67C4}"/>
-          </ac:spMkLst>
-        </pc:spChg>
-        <pc:spChg chg="add del mod">
-          <ac:chgData name="Sébastien Renaud" userId="5e596eca-c704-4701-9deb-91e2038d048e" providerId="ADAL" clId="{34329023-3EC5-4071-89E2-665FADB32EB6}" dt="2026-06-28T14:54:06.777" v="1346" actId="478"/>
-          <ac:spMkLst>
-            <pc:docMk/>
-            <pc:sldMk cId="4273313417" sldId="271"/>
-            <ac:spMk id="7" creationId="{9CF0CE40-9D45-25A6-3FEC-AE455D21E050}"/>
-          </ac:spMkLst>
-        </pc:spChg>
-        <pc:spChg chg="add del mod">
-          <ac:chgData name="Sébastien Renaud" userId="5e596eca-c704-4701-9deb-91e2038d048e" providerId="ADAL" clId="{34329023-3EC5-4071-89E2-665FADB32EB6}" dt="2026-06-27T15:26:23.197" v="42" actId="478"/>
-          <ac:spMkLst>
-            <pc:docMk/>
-            <pc:sldMk cId="4273313417" sldId="271"/>
-            <ac:spMk id="8" creationId="{FF0CC504-9F2C-134C-54B4-B9893BB8A831}"/>
           </ac:spMkLst>
         </pc:spChg>
         <pc:spChg chg="add mod">
@@ -1686,14 +1218,6 @@
             <ac:spMk id="13" creationId="{65DA9C79-EED8-DD28-7CDF-468942D663DC}"/>
           </ac:spMkLst>
         </pc:spChg>
-        <pc:spChg chg="add del mod">
-          <ac:chgData name="Sébastien Renaud" userId="5e596eca-c704-4701-9deb-91e2038d048e" providerId="ADAL" clId="{34329023-3EC5-4071-89E2-665FADB32EB6}" dt="2026-06-28T16:11:35.485" v="1758" actId="478"/>
-          <ac:spMkLst>
-            <pc:docMk/>
-            <pc:sldMk cId="4273313417" sldId="271"/>
-            <ac:spMk id="16" creationId="{6934E93B-6D6C-8F1E-BD1E-F9B9BD42E727}"/>
-          </ac:spMkLst>
-        </pc:spChg>
         <pc:picChg chg="add mod modCrop">
           <ac:chgData name="Sébastien Renaud" userId="5e596eca-c704-4701-9deb-91e2038d048e" providerId="ADAL" clId="{34329023-3EC5-4071-89E2-665FADB32EB6}" dt="2026-06-28T16:11:53.502" v="1760" actId="552"/>
           <ac:picMkLst>
@@ -1711,130 +1235,12 @@
           </ac:picMkLst>
         </pc:picChg>
       </pc:sldChg>
-      <pc:sldChg chg="del">
-        <pc:chgData name="Sébastien Renaud" userId="5e596eca-c704-4701-9deb-91e2038d048e" providerId="ADAL" clId="{34329023-3EC5-4071-89E2-665FADB32EB6}" dt="2026-06-28T16:18:56.756" v="1764" actId="47"/>
-        <pc:sldMkLst>
-          <pc:docMk/>
-          <pc:sldMk cId="2267747108" sldId="272"/>
-        </pc:sldMkLst>
-      </pc:sldChg>
-      <pc:sldChg chg="del">
-        <pc:chgData name="Sébastien Renaud" userId="5e596eca-c704-4701-9deb-91e2038d048e" providerId="ADAL" clId="{34329023-3EC5-4071-89E2-665FADB32EB6}" dt="2026-06-28T16:18:57.093" v="1765" actId="47"/>
-        <pc:sldMkLst>
-          <pc:docMk/>
-          <pc:sldMk cId="810550801" sldId="273"/>
-        </pc:sldMkLst>
-      </pc:sldChg>
-      <pc:sldChg chg="del">
-        <pc:chgData name="Sébastien Renaud" userId="5e596eca-c704-4701-9deb-91e2038d048e" providerId="ADAL" clId="{34329023-3EC5-4071-89E2-665FADB32EB6}" dt="2026-06-28T16:18:57.363" v="1766" actId="47"/>
-        <pc:sldMkLst>
-          <pc:docMk/>
-          <pc:sldMk cId="4136122249" sldId="274"/>
-        </pc:sldMkLst>
-      </pc:sldChg>
-      <pc:sldChg chg="addSp delSp modSp del mod ord">
-        <pc:chgData name="Sébastien Renaud" userId="5e596eca-c704-4701-9deb-91e2038d048e" providerId="ADAL" clId="{34329023-3EC5-4071-89E2-665FADB32EB6}" dt="2026-06-28T16:18:56.281" v="1763" actId="47"/>
-        <pc:sldMkLst>
-          <pc:docMk/>
-          <pc:sldMk cId="806993727" sldId="275"/>
-        </pc:sldMkLst>
-        <pc:spChg chg="del">
-          <ac:chgData name="Sébastien Renaud" userId="5e596eca-c704-4701-9deb-91e2038d048e" providerId="ADAL" clId="{34329023-3EC5-4071-89E2-665FADB32EB6}" dt="2026-06-27T15:36:28.794" v="166" actId="478"/>
-          <ac:spMkLst>
-            <pc:docMk/>
-            <pc:sldMk cId="806993727" sldId="275"/>
-            <ac:spMk id="2" creationId="{43118F74-9108-3F93-4960-E98BF3ECA28E}"/>
-          </ac:spMkLst>
-        </pc:spChg>
-        <pc:spChg chg="del">
-          <ac:chgData name="Sébastien Renaud" userId="5e596eca-c704-4701-9deb-91e2038d048e" providerId="ADAL" clId="{34329023-3EC5-4071-89E2-665FADB32EB6}" dt="2026-06-27T15:36:32.598" v="167" actId="478"/>
-          <ac:spMkLst>
-            <pc:docMk/>
-            <pc:sldMk cId="806993727" sldId="275"/>
-            <ac:spMk id="3" creationId="{8D513111-FA7C-D326-3566-D41842B7A511}"/>
-          </ac:spMkLst>
-        </pc:spChg>
-        <pc:spChg chg="add mod">
-          <ac:chgData name="Sébastien Renaud" userId="5e596eca-c704-4701-9deb-91e2038d048e" providerId="ADAL" clId="{34329023-3EC5-4071-89E2-665FADB32EB6}" dt="2026-06-27T15:36:28.794" v="166" actId="478"/>
-          <ac:spMkLst>
-            <pc:docMk/>
-            <pc:sldMk cId="806993727" sldId="275"/>
-            <ac:spMk id="5" creationId="{2DBA02EB-8C57-6E0C-868E-8777069B7751}"/>
-          </ac:spMkLst>
-        </pc:spChg>
-        <pc:spChg chg="add mod">
-          <ac:chgData name="Sébastien Renaud" userId="5e596eca-c704-4701-9deb-91e2038d048e" providerId="ADAL" clId="{34329023-3EC5-4071-89E2-665FADB32EB6}" dt="2026-06-27T15:36:32.598" v="167" actId="478"/>
-          <ac:spMkLst>
-            <pc:docMk/>
-            <pc:sldMk cId="806993727" sldId="275"/>
-            <ac:spMk id="7" creationId="{DE8CD39C-83CB-BE52-0166-F5EE458FB05D}"/>
-          </ac:spMkLst>
-        </pc:spChg>
-      </pc:sldChg>
-      <pc:sldChg chg="del">
-        <pc:chgData name="Sébastien Renaud" userId="5e596eca-c704-4701-9deb-91e2038d048e" providerId="ADAL" clId="{34329023-3EC5-4071-89E2-665FADB32EB6}" dt="2026-06-28T16:18:57.704" v="1767" actId="47"/>
-        <pc:sldMkLst>
-          <pc:docMk/>
-          <pc:sldMk cId="1364865219" sldId="276"/>
-        </pc:sldMkLst>
-      </pc:sldChg>
-      <pc:sldChg chg="del">
-        <pc:chgData name="Sébastien Renaud" userId="5e596eca-c704-4701-9deb-91e2038d048e" providerId="ADAL" clId="{34329023-3EC5-4071-89E2-665FADB32EB6}" dt="2026-06-28T16:18:58.614" v="1770" actId="47"/>
-        <pc:sldMkLst>
-          <pc:docMk/>
-          <pc:sldMk cId="3306550732" sldId="277"/>
-        </pc:sldMkLst>
-      </pc:sldChg>
-      <pc:sldChg chg="del">
-        <pc:chgData name="Sébastien Renaud" userId="5e596eca-c704-4701-9deb-91e2038d048e" providerId="ADAL" clId="{34329023-3EC5-4071-89E2-665FADB32EB6}" dt="2026-06-28T16:18:59.260" v="1772" actId="47"/>
-        <pc:sldMkLst>
-          <pc:docMk/>
-          <pc:sldMk cId="994256798" sldId="278"/>
-        </pc:sldMkLst>
-      </pc:sldChg>
-      <pc:sldChg chg="del">
-        <pc:chgData name="Sébastien Renaud" userId="5e596eca-c704-4701-9deb-91e2038d048e" providerId="ADAL" clId="{34329023-3EC5-4071-89E2-665FADB32EB6}" dt="2026-06-28T16:18:58.927" v="1771" actId="47"/>
-        <pc:sldMkLst>
-          <pc:docMk/>
-          <pc:sldMk cId="1343710134" sldId="279"/>
-        </pc:sldMkLst>
-      </pc:sldChg>
-      <pc:sldChg chg="add del">
-        <pc:chgData name="Sébastien Renaud" userId="5e596eca-c704-4701-9deb-91e2038d048e" providerId="ADAL" clId="{34329023-3EC5-4071-89E2-665FADB32EB6}" dt="2026-06-27T15:36:09.997" v="163" actId="47"/>
-        <pc:sldMkLst>
-          <pc:docMk/>
-          <pc:sldMk cId="3158457614" sldId="297"/>
-        </pc:sldMkLst>
-      </pc:sldChg>
-      <pc:sldChg chg="add del">
-        <pc:chgData name="Sébastien Renaud" userId="5e596eca-c704-4701-9deb-91e2038d048e" providerId="ADAL" clId="{34329023-3EC5-4071-89E2-665FADB32EB6}" dt="2026-06-28T14:44:33.023" v="1139" actId="47"/>
-        <pc:sldMkLst>
-          <pc:docMk/>
-          <pc:sldMk cId="41170022" sldId="306"/>
-        </pc:sldMkLst>
-      </pc:sldChg>
       <pc:sldMasterChg chg="delSldLayout">
         <pc:chgData name="Sébastien Renaud" userId="5e596eca-c704-4701-9deb-91e2038d048e" providerId="ADAL" clId="{34329023-3EC5-4071-89E2-665FADB32EB6}" dt="2026-06-28T16:18:55.877" v="1762" actId="47"/>
         <pc:sldMasterMkLst>
           <pc:docMk/>
           <pc:sldMasterMk cId="2513824963" sldId="2147483648"/>
         </pc:sldMasterMkLst>
-        <pc:sldLayoutChg chg="del">
-          <pc:chgData name="Sébastien Renaud" userId="5e596eca-c704-4701-9deb-91e2038d048e" providerId="ADAL" clId="{34329023-3EC5-4071-89E2-665FADB32EB6}" dt="2026-06-28T14:44:33.023" v="1139" actId="47"/>
-          <pc:sldLayoutMkLst>
-            <pc:docMk/>
-            <pc:sldMasterMk cId="2513824963" sldId="2147483648"/>
-            <pc:sldLayoutMk cId="683518175" sldId="2147483664"/>
-          </pc:sldLayoutMkLst>
-        </pc:sldLayoutChg>
-        <pc:sldLayoutChg chg="del">
-          <pc:chgData name="Sébastien Renaud" userId="5e596eca-c704-4701-9deb-91e2038d048e" providerId="ADAL" clId="{34329023-3EC5-4071-89E2-665FADB32EB6}" dt="2026-06-28T16:18:55.877" v="1762" actId="47"/>
-          <pc:sldLayoutMkLst>
-            <pc:docMk/>
-            <pc:sldMasterMk cId="2513824963" sldId="2147483648"/>
-            <pc:sldLayoutMk cId="1262739788" sldId="2147483664"/>
-          </pc:sldLayoutMkLst>
-        </pc:sldLayoutChg>
       </pc:sldMasterChg>
     </pc:docChg>
   </pc:docChgLst>
@@ -1935,7 +1341,7 @@
           <a:p>
             <a:fld id="{0C2F4FD9-6393-40EA-A13C-0717774DD95D}" type="datetimeFigureOut">
               <a:rPr lang="de-DE" smtClean="0"/>
-              <a:t>28.06.2026</a:t>
+              <a:t>30.06.2026</a:t>
             </a:fld>
             <a:endParaRPr lang="de-DE"/>
           </a:p>
@@ -2128,7 +1534,7 @@
           <a:p>
             <a:fld id="{44B79978-9587-4FFB-8987-67BE67FCF4DF}" type="datetimeFigureOut">
               <a:rPr lang="de-DE" smtClean="0"/>
-              <a:t>28.06.2026</a:t>
+              <a:t>30.06.2026</a:t>
             </a:fld>
             <a:endParaRPr lang="de-DE"/>
           </a:p>
@@ -5977,7 +5383,7 @@
           </a:ln>
           <a:extLst>
             <a:ext uri="{C572A759-6A51-4108-AA02-DFA0A04FC94B}">
-              <ma14:wrappingTextBoxFlag xmlns="" xmlns:m="http://schemas.openxmlformats.org/officeDocument/2006/math" xmlns:a14="http://schemas.microsoft.com/office/drawing/2010/main" xmlns:ma14="http://schemas.microsoft.com/office/mac/drawingml/2011/main" val="1"/>
+              <ma14:wrappingTextBoxFlag xmlns:ma14="http://schemas.microsoft.com/office/mac/drawingml/2011/main" xmlns:a14="http://schemas.microsoft.com/office/drawing/2010/main" xmlns:m="http://schemas.openxmlformats.org/officeDocument/2006/math" xmlns="" val="1"/>
             </a:ext>
           </a:extLst>
         </p:spPr>
@@ -6274,7 +5680,7 @@
           </a:ln>
           <a:extLst>
             <a:ext uri="{C572A759-6A51-4108-AA02-DFA0A04FC94B}">
-              <ma14:wrappingTextBoxFlag xmlns="" xmlns:m="http://schemas.openxmlformats.org/officeDocument/2006/math" xmlns:a14="http://schemas.microsoft.com/office/drawing/2010/main" xmlns:ma14="http://schemas.microsoft.com/office/mac/drawingml/2011/main" val="1"/>
+              <ma14:wrappingTextBoxFlag xmlns:ma14="http://schemas.microsoft.com/office/mac/drawingml/2011/main" xmlns:a14="http://schemas.microsoft.com/office/drawing/2010/main" xmlns:m="http://schemas.openxmlformats.org/officeDocument/2006/math" xmlns="" val="1"/>
             </a:ext>
           </a:extLst>
         </p:spPr>
@@ -6571,7 +5977,7 @@
           </a:ln>
           <a:extLst>
             <a:ext uri="{C572A759-6A51-4108-AA02-DFA0A04FC94B}">
-              <ma14:wrappingTextBoxFlag xmlns="" xmlns:m="http://schemas.openxmlformats.org/officeDocument/2006/math" xmlns:a14="http://schemas.microsoft.com/office/drawing/2010/main" xmlns:ma14="http://schemas.microsoft.com/office/mac/drawingml/2011/main" val="1"/>
+              <ma14:wrappingTextBoxFlag xmlns:ma14="http://schemas.microsoft.com/office/mac/drawingml/2011/main" xmlns:a14="http://schemas.microsoft.com/office/drawing/2010/main" xmlns:m="http://schemas.openxmlformats.org/officeDocument/2006/math" xmlns="" val="1"/>
             </a:ext>
           </a:extLst>
         </p:spPr>
@@ -6868,7 +6274,7 @@
           </a:ln>
           <a:extLst>
             <a:ext uri="{C572A759-6A51-4108-AA02-DFA0A04FC94B}">
-              <ma14:wrappingTextBoxFlag xmlns="" xmlns:m="http://schemas.openxmlformats.org/officeDocument/2006/math" xmlns:a14="http://schemas.microsoft.com/office/drawing/2010/main" xmlns:ma14="http://schemas.microsoft.com/office/mac/drawingml/2011/main" val="1"/>
+              <ma14:wrappingTextBoxFlag xmlns:ma14="http://schemas.microsoft.com/office/mac/drawingml/2011/main" xmlns:a14="http://schemas.microsoft.com/office/drawing/2010/main" xmlns:m="http://schemas.openxmlformats.org/officeDocument/2006/math" xmlns="" val="1"/>
             </a:ext>
           </a:extLst>
         </p:spPr>
@@ -7165,7 +6571,7 @@
           </a:ln>
           <a:extLst>
             <a:ext uri="{C572A759-6A51-4108-AA02-DFA0A04FC94B}">
-              <ma14:wrappingTextBoxFlag xmlns="" xmlns:m="http://schemas.openxmlformats.org/officeDocument/2006/math" xmlns:a14="http://schemas.microsoft.com/office/drawing/2010/main" xmlns:ma14="http://schemas.microsoft.com/office/mac/drawingml/2011/main" val="1"/>
+              <ma14:wrappingTextBoxFlag xmlns:ma14="http://schemas.microsoft.com/office/mac/drawingml/2011/main" xmlns:a14="http://schemas.microsoft.com/office/drawing/2010/main" xmlns:m="http://schemas.openxmlformats.org/officeDocument/2006/math" xmlns="" val="1"/>
             </a:ext>
           </a:extLst>
         </p:spPr>
@@ -7462,7 +6868,7 @@
           </a:ln>
           <a:extLst>
             <a:ext uri="{C572A759-6A51-4108-AA02-DFA0A04FC94B}">
-              <ma14:wrappingTextBoxFlag xmlns="" xmlns:m="http://schemas.openxmlformats.org/officeDocument/2006/math" xmlns:a14="http://schemas.microsoft.com/office/drawing/2010/main" xmlns:ma14="http://schemas.microsoft.com/office/mac/drawingml/2011/main" val="1"/>
+              <ma14:wrappingTextBoxFlag xmlns:ma14="http://schemas.microsoft.com/office/mac/drawingml/2011/main" xmlns:a14="http://schemas.microsoft.com/office/drawing/2010/main" xmlns:m="http://schemas.openxmlformats.org/officeDocument/2006/math" xmlns="" val="1"/>
             </a:ext>
           </a:extLst>
         </p:spPr>
@@ -7794,114 +7200,6 @@
       </p:grpSpPr>
       <p:sp>
         <p:nvSpPr>
-          <p:cNvPr id="90" name="Rounded Rectangle 38">
-            <a:extLst>
-              <a:ext uri="{FF2B5EF4-FFF2-40B4-BE49-F238E27FC236}">
-                <a16:creationId xmlns:a16="http://schemas.microsoft.com/office/drawing/2014/main" id="{6515D72B-6AFE-ADD3-9E55-4B0735D29F0B}"/>
-              </a:ext>
-            </a:extLst>
-          </p:cNvPr>
-          <p:cNvSpPr/>
-          <p:nvPr/>
-        </p:nvSpPr>
-        <p:spPr>
-          <a:xfrm>
-            <a:off x="207266" y="3801793"/>
-            <a:ext cx="5303519" cy="877824"/>
-          </a:xfrm>
-          <a:prstGeom prst="roundRect">
-            <a:avLst>
-              <a:gd name="adj" fmla="val 11111"/>
-            </a:avLst>
-          </a:prstGeom>
-          <a:solidFill>
-            <a:srgbClr val="F2F6FB"/>
-          </a:solidFill>
-          <a:ln w="6350">
-            <a:solidFill>
-              <a:srgbClr val="CEDFEE"/>
-            </a:solidFill>
-          </a:ln>
-        </p:spPr>
-        <p:style>
-          <a:lnRef idx="1">
-            <a:schemeClr val="accent1"/>
-          </a:lnRef>
-          <a:fillRef idx="3">
-            <a:schemeClr val="accent1"/>
-          </a:fillRef>
-          <a:effectRef idx="2">
-            <a:schemeClr val="accent1"/>
-          </a:effectRef>
-          <a:fontRef idx="minor">
-            <a:schemeClr val="lt1"/>
-          </a:fontRef>
-        </p:style>
-        <p:txBody>
-          <a:bodyPr rtlCol="0" anchor="ctr"/>
-          <a:lstStyle/>
-          <a:p>
-            <a:pPr algn="ctr"/>
-            <a:endParaRPr sz="2400"/>
-          </a:p>
-        </p:txBody>
-      </p:sp>
-      <p:sp>
-        <p:nvSpPr>
-          <p:cNvPr id="87" name="Rounded Rectangle 38">
-            <a:extLst>
-              <a:ext uri="{FF2B5EF4-FFF2-40B4-BE49-F238E27FC236}">
-                <a16:creationId xmlns:a16="http://schemas.microsoft.com/office/drawing/2014/main" id="{47134F30-0AA6-C62C-4030-8B76455FC142}"/>
-              </a:ext>
-            </a:extLst>
-          </p:cNvPr>
-          <p:cNvSpPr/>
-          <p:nvPr/>
-        </p:nvSpPr>
-        <p:spPr>
-          <a:xfrm>
-            <a:off x="228980" y="2838070"/>
-            <a:ext cx="5303519" cy="877824"/>
-          </a:xfrm>
-          <a:prstGeom prst="roundRect">
-            <a:avLst>
-              <a:gd name="adj" fmla="val 11111"/>
-            </a:avLst>
-          </a:prstGeom>
-          <a:solidFill>
-            <a:srgbClr val="F2F6FB"/>
-          </a:solidFill>
-          <a:ln w="6350">
-            <a:solidFill>
-              <a:srgbClr val="CEDFEE"/>
-            </a:solidFill>
-          </a:ln>
-        </p:spPr>
-        <p:style>
-          <a:lnRef idx="1">
-            <a:schemeClr val="accent1"/>
-          </a:lnRef>
-          <a:fillRef idx="3">
-            <a:schemeClr val="accent1"/>
-          </a:fillRef>
-          <a:effectRef idx="2">
-            <a:schemeClr val="accent1"/>
-          </a:effectRef>
-          <a:fontRef idx="minor">
-            <a:schemeClr val="lt1"/>
-          </a:fontRef>
-        </p:style>
-        <p:txBody>
-          <a:bodyPr rtlCol="0" anchor="ctr"/>
-          <a:lstStyle/>
-          <a:p>
-            <a:pPr algn="ctr"/>
-            <a:endParaRPr sz="2400"/>
-          </a:p>
-        </p:txBody>
-      </p:sp>
-      <p:sp>
-        <p:nvSpPr>
           <p:cNvPr id="85" name="Rounded Rectangle 38">
             <a:extLst>
               <a:ext uri="{FF2B5EF4-FFF2-40B4-BE49-F238E27FC236}">
@@ -8320,554 +7618,6 @@
       </p:sp>
       <p:sp>
         <p:nvSpPr>
-          <p:cNvPr id="23" name="TextBox 22"/>
-          <p:cNvSpPr txBox="1"/>
-          <p:nvPr/>
-        </p:nvSpPr>
-        <p:spPr>
-          <a:xfrm>
-            <a:off x="633984" y="1948054"/>
-            <a:ext cx="3840480" cy="276999"/>
-          </a:xfrm>
-          <a:prstGeom prst="rect">
-            <a:avLst/>
-          </a:prstGeom>
-          <a:noFill/>
-        </p:spPr>
-        <p:txBody>
-          <a:bodyPr wrap="square">
-            <a:spAutoFit/>
-          </a:bodyPr>
-          <a:lstStyle/>
-          <a:p>
-            <a:pPr algn="l"/>
-            <a:r>
-              <a:rPr sz="1200" b="1" dirty="0">
-                <a:solidFill>
-                  <a:srgbClr val="0B4A89"/>
-                </a:solidFill>
-              </a:rPr>
-              <a:t>QI Football</a:t>
-            </a:r>
-          </a:p>
-        </p:txBody>
-      </p:sp>
-      <p:sp>
-        <p:nvSpPr>
-          <p:cNvPr id="24" name="Rounded Rectangle 23"/>
-          <p:cNvSpPr/>
-          <p:nvPr/>
-        </p:nvSpPr>
-        <p:spPr>
-          <a:xfrm>
-            <a:off x="4406813" y="1960244"/>
-            <a:ext cx="1036319" cy="268224"/>
-          </a:xfrm>
-          <a:prstGeom prst="roundRect">
-            <a:avLst>
-              <a:gd name="adj" fmla="val 36363"/>
-            </a:avLst>
-          </a:prstGeom>
-          <a:solidFill>
-            <a:srgbClr val="FFFFFF"/>
-          </a:solidFill>
-          <a:ln w="10160">
-            <a:solidFill>
-              <a:srgbClr val="0B61AC"/>
-            </a:solidFill>
-          </a:ln>
-        </p:spPr>
-        <p:style>
-          <a:lnRef idx="1">
-            <a:schemeClr val="accent1"/>
-          </a:lnRef>
-          <a:fillRef idx="3">
-            <a:schemeClr val="accent1"/>
-          </a:fillRef>
-          <a:effectRef idx="2">
-            <a:schemeClr val="accent1"/>
-          </a:effectRef>
-          <a:fontRef idx="minor">
-            <a:schemeClr val="lt1"/>
-          </a:fontRef>
-        </p:style>
-        <p:txBody>
-          <a:bodyPr rtlCol="0" anchor="ctr"/>
-          <a:lstStyle/>
-          <a:p>
-            <a:pPr algn="ctr"/>
-            <a:endParaRPr sz="2400"/>
-          </a:p>
-        </p:txBody>
-      </p:sp>
-      <p:sp>
-        <p:nvSpPr>
-          <p:cNvPr id="25" name="TextBox 24"/>
-          <p:cNvSpPr txBox="1"/>
-          <p:nvPr/>
-        </p:nvSpPr>
-        <p:spPr>
-          <a:xfrm>
-            <a:off x="4406813" y="1972436"/>
-            <a:ext cx="1036319" cy="246221"/>
-          </a:xfrm>
-          <a:prstGeom prst="rect">
-            <a:avLst/>
-          </a:prstGeom>
-          <a:noFill/>
-        </p:spPr>
-        <p:txBody>
-          <a:bodyPr wrap="square">
-            <a:spAutoFit/>
-          </a:bodyPr>
-          <a:lstStyle/>
-          <a:p>
-            <a:pPr algn="ctr"/>
-            <a:r>
-              <a:rPr sz="1000" b="1" dirty="0">
-                <a:solidFill>
-                  <a:srgbClr val="0B4A89"/>
-                </a:solidFill>
-              </a:rPr>
-              <a:t>DATA</a:t>
-            </a:r>
-          </a:p>
-        </p:txBody>
-      </p:sp>
-      <p:sp>
-        <p:nvSpPr>
-          <p:cNvPr id="26" name="TextBox 25"/>
-          <p:cNvSpPr txBox="1"/>
-          <p:nvPr/>
-        </p:nvSpPr>
-        <p:spPr>
-          <a:xfrm>
-            <a:off x="682752" y="2204086"/>
-            <a:ext cx="4608576" cy="246221"/>
-          </a:xfrm>
-          <a:prstGeom prst="rect">
-            <a:avLst/>
-          </a:prstGeom>
-          <a:noFill/>
-        </p:spPr>
-        <p:txBody>
-          <a:bodyPr wrap="square">
-            <a:spAutoFit/>
-          </a:bodyPr>
-          <a:lstStyle/>
-          <a:p>
-            <a:pPr algn="l"/>
-            <a:r>
-              <a:rPr sz="1000" dirty="0">
-                <a:solidFill>
-                  <a:srgbClr val="0B4A89"/>
-                </a:solidFill>
-              </a:rPr>
-              <a:t>↳  </a:t>
-            </a:r>
-            <a:r>
-              <a:rPr sz="1000" dirty="0" err="1">
-                <a:solidFill>
-                  <a:srgbClr val="0B4A89"/>
-                </a:solidFill>
-              </a:rPr>
-              <a:t>utliisation</a:t>
-            </a:r>
-            <a:r>
-              <a:rPr sz="1000" dirty="0">
-                <a:solidFill>
-                  <a:srgbClr val="0B4A89"/>
-                </a:solidFill>
-              </a:rPr>
-              <a:t> des </a:t>
-            </a:r>
-            <a:r>
-              <a:rPr sz="1000" dirty="0" err="1">
-                <a:solidFill>
-                  <a:srgbClr val="0B4A89"/>
-                </a:solidFill>
-              </a:rPr>
-              <a:t>carrées</a:t>
-            </a:r>
-            <a:r>
-              <a:rPr sz="1000" dirty="0">
-                <a:solidFill>
-                  <a:srgbClr val="0B4A89"/>
-                </a:solidFill>
-              </a:rPr>
-              <a:t>, compensation</a:t>
-            </a:r>
-          </a:p>
-        </p:txBody>
-      </p:sp>
-      <p:sp>
-        <p:nvSpPr>
-          <p:cNvPr id="28" name="TextBox 27"/>
-          <p:cNvSpPr txBox="1"/>
-          <p:nvPr/>
-        </p:nvSpPr>
-        <p:spPr>
-          <a:xfrm>
-            <a:off x="610131" y="2962046"/>
-            <a:ext cx="3840480" cy="276999"/>
-          </a:xfrm>
-          <a:prstGeom prst="rect">
-            <a:avLst/>
-          </a:prstGeom>
-          <a:noFill/>
-        </p:spPr>
-        <p:txBody>
-          <a:bodyPr wrap="square">
-            <a:spAutoFit/>
-          </a:bodyPr>
-          <a:lstStyle/>
-          <a:p>
-            <a:pPr algn="l"/>
-            <a:r>
-              <a:rPr sz="1200" b="1" dirty="0" err="1">
-                <a:solidFill>
-                  <a:srgbClr val="0E1116"/>
-                </a:solidFill>
-              </a:rPr>
-              <a:t>Qualié</a:t>
-            </a:r>
-            <a:r>
-              <a:rPr sz="1200" b="1" dirty="0">
-                <a:solidFill>
-                  <a:srgbClr val="0E1116"/>
-                </a:solidFill>
-              </a:rPr>
-              <a:t> et </a:t>
-            </a:r>
-            <a:r>
-              <a:rPr sz="1200" b="1" dirty="0" err="1">
-                <a:solidFill>
-                  <a:srgbClr val="0E1116"/>
-                </a:solidFill>
-              </a:rPr>
-              <a:t>intensité</a:t>
-            </a:r>
-            <a:r>
-              <a:rPr sz="1200" b="1" dirty="0">
-                <a:solidFill>
-                  <a:srgbClr val="0E1116"/>
-                </a:solidFill>
-              </a:rPr>
-              <a:t> de passe</a:t>
-            </a:r>
-          </a:p>
-        </p:txBody>
-      </p:sp>
-      <p:sp>
-        <p:nvSpPr>
-          <p:cNvPr id="29" name="Rounded Rectangle 28"/>
-          <p:cNvSpPr/>
-          <p:nvPr/>
-        </p:nvSpPr>
-        <p:spPr>
-          <a:xfrm>
-            <a:off x="4402050" y="2958331"/>
-            <a:ext cx="1045844" cy="268224"/>
-          </a:xfrm>
-          <a:prstGeom prst="roundRect">
-            <a:avLst>
-              <a:gd name="adj" fmla="val 36363"/>
-            </a:avLst>
-          </a:prstGeom>
-          <a:solidFill>
-            <a:srgbClr val="FFFFFF"/>
-          </a:solidFill>
-          <a:ln w="10160">
-            <a:solidFill>
-              <a:srgbClr val="0B61AC"/>
-            </a:solidFill>
-          </a:ln>
-        </p:spPr>
-        <p:style>
-          <a:lnRef idx="1">
-            <a:schemeClr val="accent1"/>
-          </a:lnRef>
-          <a:fillRef idx="3">
-            <a:schemeClr val="accent1"/>
-          </a:fillRef>
-          <a:effectRef idx="2">
-            <a:schemeClr val="accent1"/>
-          </a:effectRef>
-          <a:fontRef idx="minor">
-            <a:schemeClr val="lt1"/>
-          </a:fontRef>
-        </p:style>
-        <p:txBody>
-          <a:bodyPr rtlCol="0" anchor="ctr"/>
-          <a:lstStyle/>
-          <a:p>
-            <a:pPr algn="ctr"/>
-            <a:endParaRPr sz="2400"/>
-          </a:p>
-        </p:txBody>
-      </p:sp>
-      <p:sp>
-        <p:nvSpPr>
-          <p:cNvPr id="30" name="TextBox 29"/>
-          <p:cNvSpPr txBox="1"/>
-          <p:nvPr/>
-        </p:nvSpPr>
-        <p:spPr>
-          <a:xfrm>
-            <a:off x="4402050" y="2986428"/>
-            <a:ext cx="1045844" cy="246221"/>
-          </a:xfrm>
-          <a:prstGeom prst="rect">
-            <a:avLst/>
-          </a:prstGeom>
-          <a:noFill/>
-        </p:spPr>
-        <p:txBody>
-          <a:bodyPr wrap="square">
-            <a:spAutoFit/>
-          </a:bodyPr>
-          <a:lstStyle/>
-          <a:p>
-            <a:pPr algn="ctr"/>
-            <a:r>
-              <a:rPr sz="1000" b="1" dirty="0">
-                <a:solidFill>
-                  <a:srgbClr val="0B61AC"/>
-                </a:solidFill>
-              </a:rPr>
-              <a:t>DATA</a:t>
-            </a:r>
-          </a:p>
-        </p:txBody>
-      </p:sp>
-      <p:sp>
-        <p:nvSpPr>
-          <p:cNvPr id="31" name="TextBox 30"/>
-          <p:cNvSpPr txBox="1"/>
-          <p:nvPr/>
-        </p:nvSpPr>
-        <p:spPr>
-          <a:xfrm>
-            <a:off x="658899" y="3218078"/>
-            <a:ext cx="4608576" cy="246221"/>
-          </a:xfrm>
-          <a:prstGeom prst="rect">
-            <a:avLst/>
-          </a:prstGeom>
-          <a:noFill/>
-        </p:spPr>
-        <p:txBody>
-          <a:bodyPr wrap="square">
-            <a:spAutoFit/>
-          </a:bodyPr>
-          <a:lstStyle/>
-          <a:p>
-            <a:pPr algn="l"/>
-            <a:r>
-              <a:rPr sz="1000" dirty="0">
-                <a:solidFill>
-                  <a:srgbClr val="5E6B82"/>
-                </a:solidFill>
-              </a:rPr>
-              <a:t>↳  % passe </a:t>
-            </a:r>
-            <a:r>
-              <a:rPr sz="1000" dirty="0" err="1">
-                <a:solidFill>
-                  <a:srgbClr val="5E6B82"/>
-                </a:solidFill>
-              </a:rPr>
-              <a:t>reussies</a:t>
-            </a:r>
-            <a:r>
-              <a:rPr sz="1000" dirty="0">
-                <a:solidFill>
-                  <a:srgbClr val="5E6B82"/>
-                </a:solidFill>
-              </a:rPr>
-              <a:t>, % de jeu vers </a:t>
-            </a:r>
-            <a:r>
-              <a:rPr sz="1000" dirty="0" err="1">
-                <a:solidFill>
-                  <a:srgbClr val="5E6B82"/>
-                </a:solidFill>
-              </a:rPr>
-              <a:t>l'avant</a:t>
-            </a:r>
-            <a:endParaRPr sz="1000" dirty="0">
-              <a:solidFill>
-                <a:srgbClr val="5E6B82"/>
-              </a:solidFill>
-            </a:endParaRPr>
-          </a:p>
-        </p:txBody>
-      </p:sp>
-      <p:sp>
-        <p:nvSpPr>
-          <p:cNvPr id="33" name="TextBox 32"/>
-          <p:cNvSpPr txBox="1"/>
-          <p:nvPr/>
-        </p:nvSpPr>
-        <p:spPr>
-          <a:xfrm>
-            <a:off x="584556" y="4004689"/>
-            <a:ext cx="3840480" cy="276999"/>
-          </a:xfrm>
-          <a:prstGeom prst="rect">
-            <a:avLst/>
-          </a:prstGeom>
-          <a:noFill/>
-        </p:spPr>
-        <p:txBody>
-          <a:bodyPr wrap="square">
-            <a:spAutoFit/>
-          </a:bodyPr>
-          <a:lstStyle/>
-          <a:p>
-            <a:pPr algn="l"/>
-            <a:r>
-              <a:rPr sz="1200" b="1" dirty="0">
-                <a:solidFill>
-                  <a:srgbClr val="0E1116"/>
-                </a:solidFill>
-              </a:rPr>
-              <a:t>Coup de pied </a:t>
-            </a:r>
-            <a:r>
-              <a:rPr sz="1200" b="1" dirty="0" err="1">
-                <a:solidFill>
-                  <a:srgbClr val="0E1116"/>
-                </a:solidFill>
-              </a:rPr>
-              <a:t>arrétés</a:t>
-            </a:r>
-            <a:endParaRPr sz="1200" b="1" dirty="0">
-              <a:solidFill>
-                <a:srgbClr val="0E1116"/>
-              </a:solidFill>
-            </a:endParaRPr>
-          </a:p>
-        </p:txBody>
-      </p:sp>
-      <p:sp>
-        <p:nvSpPr>
-          <p:cNvPr id="34" name="Rounded Rectangle 33"/>
-          <p:cNvSpPr/>
-          <p:nvPr/>
-        </p:nvSpPr>
-        <p:spPr>
-          <a:xfrm>
-            <a:off x="4406813" y="4007356"/>
-            <a:ext cx="1036319" cy="268224"/>
-          </a:xfrm>
-          <a:prstGeom prst="roundRect">
-            <a:avLst>
-              <a:gd name="adj" fmla="val 36363"/>
-            </a:avLst>
-          </a:prstGeom>
-          <a:solidFill>
-            <a:srgbClr val="FFFFFF"/>
-          </a:solidFill>
-          <a:ln w="10160">
-            <a:solidFill>
-              <a:srgbClr val="0B61AC"/>
-            </a:solidFill>
-          </a:ln>
-        </p:spPr>
-        <p:style>
-          <a:lnRef idx="1">
-            <a:schemeClr val="accent1"/>
-          </a:lnRef>
-          <a:fillRef idx="3">
-            <a:schemeClr val="accent1"/>
-          </a:fillRef>
-          <a:effectRef idx="2">
-            <a:schemeClr val="accent1"/>
-          </a:effectRef>
-          <a:fontRef idx="minor">
-            <a:schemeClr val="lt1"/>
-          </a:fontRef>
-        </p:style>
-        <p:txBody>
-          <a:bodyPr rtlCol="0" anchor="ctr"/>
-          <a:lstStyle/>
-          <a:p>
-            <a:pPr algn="ctr"/>
-            <a:endParaRPr sz="2400"/>
-          </a:p>
-        </p:txBody>
-      </p:sp>
-      <p:sp>
-        <p:nvSpPr>
-          <p:cNvPr id="35" name="TextBox 34"/>
-          <p:cNvSpPr txBox="1"/>
-          <p:nvPr/>
-        </p:nvSpPr>
-        <p:spPr>
-          <a:xfrm>
-            <a:off x="4414243" y="4029073"/>
-            <a:ext cx="1021459" cy="246221"/>
-          </a:xfrm>
-          <a:prstGeom prst="rect">
-            <a:avLst/>
-          </a:prstGeom>
-          <a:noFill/>
-        </p:spPr>
-        <p:txBody>
-          <a:bodyPr wrap="square">
-            <a:spAutoFit/>
-          </a:bodyPr>
-          <a:lstStyle/>
-          <a:p>
-            <a:pPr algn="ctr"/>
-            <a:r>
-              <a:rPr sz="1000" b="1" dirty="0">
-                <a:solidFill>
-                  <a:srgbClr val="0B61AC"/>
-                </a:solidFill>
-              </a:rPr>
-              <a:t>DATA</a:t>
-            </a:r>
-          </a:p>
-        </p:txBody>
-      </p:sp>
-      <p:sp>
-        <p:nvSpPr>
-          <p:cNvPr id="36" name="TextBox 35"/>
-          <p:cNvSpPr txBox="1"/>
-          <p:nvPr/>
-        </p:nvSpPr>
-        <p:spPr>
-          <a:xfrm>
-            <a:off x="633324" y="4260721"/>
-            <a:ext cx="4608576" cy="246221"/>
-          </a:xfrm>
-          <a:prstGeom prst="rect">
-            <a:avLst/>
-          </a:prstGeom>
-          <a:noFill/>
-        </p:spPr>
-        <p:txBody>
-          <a:bodyPr wrap="square">
-            <a:spAutoFit/>
-          </a:bodyPr>
-          <a:lstStyle/>
-          <a:p>
-            <a:pPr algn="l"/>
-            <a:r>
-              <a:rPr sz="1000" dirty="0">
-                <a:solidFill>
-                  <a:srgbClr val="5E6B82"/>
-                </a:solidFill>
-              </a:rPr>
-              <a:t>↳  Buts sur CFD</a:t>
-            </a:r>
-          </a:p>
-        </p:txBody>
-      </p:sp>
-      <p:sp>
-        <p:nvSpPr>
           <p:cNvPr id="37" name="TextBox 36"/>
           <p:cNvSpPr txBox="1"/>
           <p:nvPr/>
@@ -10211,96 +8961,6 @@
           </a:p>
         </p:txBody>
       </p:sp>
-      <p:sp>
-        <p:nvSpPr>
-          <p:cNvPr id="89" name="TextBox 39">
-            <a:extLst>
-              <a:ext uri="{FF2B5EF4-FFF2-40B4-BE49-F238E27FC236}">
-                <a16:creationId xmlns:a16="http://schemas.microsoft.com/office/drawing/2014/main" id="{27C4E97F-D638-5BD9-5A00-1274EA03B2F3}"/>
-              </a:ext>
-            </a:extLst>
-          </p:cNvPr>
-          <p:cNvSpPr txBox="1"/>
-          <p:nvPr/>
-        </p:nvSpPr>
-        <p:spPr>
-          <a:xfrm>
-            <a:off x="264564" y="2939947"/>
-            <a:ext cx="435483" cy="297454"/>
-          </a:xfrm>
-          <a:prstGeom prst="rect">
-            <a:avLst/>
-          </a:prstGeom>
-          <a:noFill/>
-        </p:spPr>
-        <p:txBody>
-          <a:bodyPr wrap="square">
-            <a:spAutoFit/>
-          </a:bodyPr>
-          <a:lstStyle/>
-          <a:p>
-            <a:pPr algn="l"/>
-            <a:r>
-              <a:rPr lang="fr-FR" sz="1333" b="1" dirty="0">
-                <a:solidFill>
-                  <a:srgbClr val="0B61AC"/>
-                </a:solidFill>
-              </a:rPr>
-              <a:t>F2</a:t>
-            </a:r>
-            <a:endParaRPr sz="1333" b="1" dirty="0">
-              <a:solidFill>
-                <a:srgbClr val="0B61AC"/>
-              </a:solidFill>
-            </a:endParaRPr>
-          </a:p>
-        </p:txBody>
-      </p:sp>
-      <p:sp>
-        <p:nvSpPr>
-          <p:cNvPr id="91" name="TextBox 39">
-            <a:extLst>
-              <a:ext uri="{FF2B5EF4-FFF2-40B4-BE49-F238E27FC236}">
-                <a16:creationId xmlns:a16="http://schemas.microsoft.com/office/drawing/2014/main" id="{D441232B-E5D0-E63D-C418-0626A54E01A7}"/>
-              </a:ext>
-            </a:extLst>
-          </p:cNvPr>
-          <p:cNvSpPr txBox="1"/>
-          <p:nvPr/>
-        </p:nvSpPr>
-        <p:spPr>
-          <a:xfrm>
-            <a:off x="238989" y="3984878"/>
-            <a:ext cx="435483" cy="297454"/>
-          </a:xfrm>
-          <a:prstGeom prst="rect">
-            <a:avLst/>
-          </a:prstGeom>
-          <a:noFill/>
-        </p:spPr>
-        <p:txBody>
-          <a:bodyPr wrap="square">
-            <a:spAutoFit/>
-          </a:bodyPr>
-          <a:lstStyle/>
-          <a:p>
-            <a:pPr algn="l"/>
-            <a:r>
-              <a:rPr lang="fr-FR" sz="1333" b="1" dirty="0">
-                <a:solidFill>
-                  <a:srgbClr val="0B61AC"/>
-                </a:solidFill>
-              </a:rPr>
-              <a:t>F3</a:t>
-            </a:r>
-            <a:endParaRPr sz="1333" b="1" dirty="0">
-              <a:solidFill>
-                <a:srgbClr val="0B61AC"/>
-              </a:solidFill>
-            </a:endParaRPr>
-          </a:p>
-        </p:txBody>
-      </p:sp>
       <p:pic>
         <p:nvPicPr>
           <p:cNvPr id="92" name="Image 91">
@@ -10425,8 +9085,21 @@
                   <a:srgbClr val="0B61AC"/>
                 </a:solidFill>
               </a:rPr>
-              <a:t>A2</a:t>
-            </a:r>
+              <a:t>A</a:t>
+            </a:r>
+            <a:r>
+              <a:rPr lang="fr-FR" sz="1333" b="1" dirty="0">
+                <a:solidFill>
+                  <a:srgbClr val="0B61AC"/>
+                </a:solidFill>
+              </a:rPr>
+              <a:t>3</a:t>
+            </a:r>
+            <a:endParaRPr sz="1333" b="1" dirty="0">
+              <a:solidFill>
+                <a:srgbClr val="0B61AC"/>
+              </a:solidFill>
+            </a:endParaRPr>
           </a:p>
         </p:txBody>
       </p:sp>
@@ -10761,6 +9434,1163 @@
           </a:prstGeom>
         </p:spPr>
       </p:pic>
+      <p:sp>
+        <p:nvSpPr>
+          <p:cNvPr id="15" name="TextBox 40">
+            <a:extLst>
+              <a:ext uri="{FF2B5EF4-FFF2-40B4-BE49-F238E27FC236}">
+                <a16:creationId xmlns:a16="http://schemas.microsoft.com/office/drawing/2014/main" id="{6B737596-02C1-60E0-07FC-CC6AB3DF139C}"/>
+              </a:ext>
+            </a:extLst>
+          </p:cNvPr>
+          <p:cNvSpPr txBox="1"/>
+          <p:nvPr/>
+        </p:nvSpPr>
+        <p:spPr>
+          <a:xfrm>
+            <a:off x="716417" y="1924998"/>
+            <a:ext cx="3377183" cy="287323"/>
+          </a:xfrm>
+          <a:prstGeom prst="rect">
+            <a:avLst/>
+          </a:prstGeom>
+          <a:noFill/>
+        </p:spPr>
+        <p:txBody>
+          <a:bodyPr wrap="square">
+            <a:spAutoFit/>
+          </a:bodyPr>
+          <a:lstStyle/>
+          <a:p>
+            <a:pPr algn="l"/>
+            <a:r>
+              <a:rPr sz="1267" b="1" dirty="0" err="1">
+                <a:solidFill>
+                  <a:srgbClr val="0E1116"/>
+                </a:solidFill>
+              </a:rPr>
+              <a:t>Avoir</a:t>
+            </a:r>
+            <a:r>
+              <a:rPr sz="1267" b="1" dirty="0">
+                <a:solidFill>
+                  <a:srgbClr val="0E1116"/>
+                </a:solidFill>
+              </a:rPr>
+              <a:t> plus </a:t>
+            </a:r>
+            <a:r>
+              <a:rPr sz="1267" b="1" dirty="0" err="1">
+                <a:solidFill>
+                  <a:srgbClr val="0E1116"/>
+                </a:solidFill>
+              </a:rPr>
+              <a:t>d'impact</a:t>
+            </a:r>
+            <a:r>
+              <a:rPr sz="1267" b="1" dirty="0">
+                <a:solidFill>
+                  <a:srgbClr val="0E1116"/>
+                </a:solidFill>
+              </a:rPr>
+              <a:t> </a:t>
+            </a:r>
+            <a:r>
+              <a:rPr sz="1267" b="1" dirty="0" err="1">
+                <a:solidFill>
+                  <a:srgbClr val="0E1116"/>
+                </a:solidFill>
+              </a:rPr>
+              <a:t>défensif</a:t>
+            </a:r>
+            <a:endParaRPr sz="1267" b="1" dirty="0">
+              <a:solidFill>
+                <a:srgbClr val="0E1116"/>
+              </a:solidFill>
+            </a:endParaRPr>
+          </a:p>
+        </p:txBody>
+      </p:sp>
+      <p:sp>
+        <p:nvSpPr>
+          <p:cNvPr id="22" name="Rounded Rectangle 41">
+            <a:extLst>
+              <a:ext uri="{FF2B5EF4-FFF2-40B4-BE49-F238E27FC236}">
+                <a16:creationId xmlns:a16="http://schemas.microsoft.com/office/drawing/2014/main" id="{5081D21A-9837-CE00-B796-B67EE55E0224}"/>
+              </a:ext>
+            </a:extLst>
+          </p:cNvPr>
+          <p:cNvSpPr/>
+          <p:nvPr/>
+        </p:nvSpPr>
+        <p:spPr>
+          <a:xfrm>
+            <a:off x="4264288" y="1924997"/>
+            <a:ext cx="1219200" cy="268224"/>
+          </a:xfrm>
+          <a:prstGeom prst="roundRect">
+            <a:avLst>
+              <a:gd name="adj" fmla="val 36363"/>
+            </a:avLst>
+          </a:prstGeom>
+          <a:solidFill>
+            <a:srgbClr val="FFFFFF"/>
+          </a:solidFill>
+          <a:ln w="10160">
+            <a:solidFill>
+              <a:srgbClr val="5E6B82"/>
+            </a:solidFill>
+          </a:ln>
+        </p:spPr>
+        <p:style>
+          <a:lnRef idx="1">
+            <a:schemeClr val="accent1"/>
+          </a:lnRef>
+          <a:fillRef idx="3">
+            <a:schemeClr val="accent1"/>
+          </a:fillRef>
+          <a:effectRef idx="2">
+            <a:schemeClr val="accent1"/>
+          </a:effectRef>
+          <a:fontRef idx="minor">
+            <a:schemeClr val="lt1"/>
+          </a:fontRef>
+        </p:style>
+        <p:txBody>
+          <a:bodyPr rtlCol="0" anchor="ctr"/>
+          <a:lstStyle/>
+          <a:p>
+            <a:pPr algn="ctr"/>
+            <a:endParaRPr sz="2400"/>
+          </a:p>
+        </p:txBody>
+      </p:sp>
+      <p:sp>
+        <p:nvSpPr>
+          <p:cNvPr id="27" name="TextBox 42">
+            <a:extLst>
+              <a:ext uri="{FF2B5EF4-FFF2-40B4-BE49-F238E27FC236}">
+                <a16:creationId xmlns:a16="http://schemas.microsoft.com/office/drawing/2014/main" id="{7BA4FAB0-6209-C8B0-5488-975F35F7133C}"/>
+              </a:ext>
+            </a:extLst>
+          </p:cNvPr>
+          <p:cNvSpPr txBox="1"/>
+          <p:nvPr/>
+        </p:nvSpPr>
+        <p:spPr>
+          <a:xfrm>
+            <a:off x="4264288" y="1937189"/>
+            <a:ext cx="1219200" cy="246221"/>
+          </a:xfrm>
+          <a:prstGeom prst="rect">
+            <a:avLst/>
+          </a:prstGeom>
+          <a:noFill/>
+        </p:spPr>
+        <p:txBody>
+          <a:bodyPr wrap="square">
+            <a:spAutoFit/>
+          </a:bodyPr>
+          <a:lstStyle/>
+          <a:p>
+            <a:pPr algn="ctr"/>
+            <a:r>
+              <a:rPr sz="1000" b="1" dirty="0">
+                <a:solidFill>
+                  <a:srgbClr val="5E6B82"/>
+                </a:solidFill>
+              </a:rPr>
+              <a:t>À lancer</a:t>
+            </a:r>
+          </a:p>
+        </p:txBody>
+      </p:sp>
+      <p:sp>
+        <p:nvSpPr>
+          <p:cNvPr id="32" name="TextBox 43">
+            <a:extLst>
+              <a:ext uri="{FF2B5EF4-FFF2-40B4-BE49-F238E27FC236}">
+                <a16:creationId xmlns:a16="http://schemas.microsoft.com/office/drawing/2014/main" id="{F8972F5D-2925-BF7A-577A-7CCC3DED9735}"/>
+              </a:ext>
+            </a:extLst>
+          </p:cNvPr>
+          <p:cNvSpPr txBox="1"/>
+          <p:nvPr/>
+        </p:nvSpPr>
+        <p:spPr>
+          <a:xfrm>
+            <a:off x="326272" y="2229799"/>
+            <a:ext cx="1158240" cy="235898"/>
+          </a:xfrm>
+          <a:prstGeom prst="rect">
+            <a:avLst/>
+          </a:prstGeom>
+          <a:noFill/>
+        </p:spPr>
+        <p:txBody>
+          <a:bodyPr wrap="square">
+            <a:spAutoFit/>
+          </a:bodyPr>
+          <a:lstStyle/>
+          <a:p>
+            <a:pPr algn="l"/>
+            <a:r>
+              <a:rPr sz="933" b="1" dirty="0">
+                <a:solidFill>
+                  <a:srgbClr val="0B4A89"/>
+                </a:solidFill>
+              </a:rPr>
+              <a:t>M'ENTRAÎNER</a:t>
+            </a:r>
+          </a:p>
+        </p:txBody>
+      </p:sp>
+      <p:sp>
+        <p:nvSpPr>
+          <p:cNvPr id="58" name="TextBox 44">
+            <a:extLst>
+              <a:ext uri="{FF2B5EF4-FFF2-40B4-BE49-F238E27FC236}">
+                <a16:creationId xmlns:a16="http://schemas.microsoft.com/office/drawing/2014/main" id="{0B156722-C043-DA28-CFCC-04A8C95BBD84}"/>
+              </a:ext>
+            </a:extLst>
+          </p:cNvPr>
+          <p:cNvSpPr txBox="1"/>
+          <p:nvPr/>
+        </p:nvSpPr>
+        <p:spPr>
+          <a:xfrm>
+            <a:off x="1496705" y="2229799"/>
+            <a:ext cx="3986783" cy="246221"/>
+          </a:xfrm>
+          <a:prstGeom prst="rect">
+            <a:avLst/>
+          </a:prstGeom>
+          <a:noFill/>
+        </p:spPr>
+        <p:txBody>
+          <a:bodyPr wrap="square">
+            <a:spAutoFit/>
+          </a:bodyPr>
+          <a:lstStyle/>
+          <a:p>
+            <a:pPr algn="l"/>
+            <a:r>
+              <a:rPr sz="1000" dirty="0">
+                <a:solidFill>
+                  <a:srgbClr val="0E1116"/>
+                </a:solidFill>
+              </a:rPr>
+              <a:t>lire encore </a:t>
+            </a:r>
+            <a:r>
+              <a:rPr sz="1000" dirty="0" err="1">
+                <a:solidFill>
+                  <a:srgbClr val="0E1116"/>
+                </a:solidFill>
+              </a:rPr>
+              <a:t>mieux</a:t>
+            </a:r>
+            <a:r>
+              <a:rPr sz="1000" dirty="0">
+                <a:solidFill>
+                  <a:srgbClr val="0E1116"/>
+                </a:solidFill>
+              </a:rPr>
+              <a:t> le jeu et </a:t>
+            </a:r>
+            <a:r>
+              <a:rPr sz="1000" dirty="0" err="1">
+                <a:solidFill>
+                  <a:srgbClr val="0E1116"/>
+                </a:solidFill>
+              </a:rPr>
+              <a:t>gagner</a:t>
+            </a:r>
+            <a:r>
+              <a:rPr sz="1000" dirty="0">
+                <a:solidFill>
+                  <a:srgbClr val="0E1116"/>
+                </a:solidFill>
+              </a:rPr>
+              <a:t> des duels</a:t>
+            </a:r>
+          </a:p>
+        </p:txBody>
+      </p:sp>
+      <p:sp>
+        <p:nvSpPr>
+          <p:cNvPr id="59" name="TextBox 45">
+            <a:extLst>
+              <a:ext uri="{FF2B5EF4-FFF2-40B4-BE49-F238E27FC236}">
+                <a16:creationId xmlns:a16="http://schemas.microsoft.com/office/drawing/2014/main" id="{D346899E-3B55-95C5-A06D-E854FD577221}"/>
+              </a:ext>
+            </a:extLst>
+          </p:cNvPr>
+          <p:cNvSpPr txBox="1"/>
+          <p:nvPr/>
+        </p:nvSpPr>
+        <p:spPr>
+          <a:xfrm>
+            <a:off x="326272" y="2449255"/>
+            <a:ext cx="1158240" cy="235898"/>
+          </a:xfrm>
+          <a:prstGeom prst="rect">
+            <a:avLst/>
+          </a:prstGeom>
+          <a:noFill/>
+        </p:spPr>
+        <p:txBody>
+          <a:bodyPr wrap="square">
+            <a:spAutoFit/>
+          </a:bodyPr>
+          <a:lstStyle/>
+          <a:p>
+            <a:pPr algn="l"/>
+            <a:r>
+              <a:rPr sz="933" b="1">
+                <a:solidFill>
+                  <a:srgbClr val="3C81BD"/>
+                </a:solidFill>
+              </a:rPr>
+              <a:t>PROGRESSER</a:t>
+            </a:r>
+          </a:p>
+        </p:txBody>
+      </p:sp>
+      <p:sp>
+        <p:nvSpPr>
+          <p:cNvPr id="67" name="TextBox 46">
+            <a:extLst>
+              <a:ext uri="{FF2B5EF4-FFF2-40B4-BE49-F238E27FC236}">
+                <a16:creationId xmlns:a16="http://schemas.microsoft.com/office/drawing/2014/main" id="{025D4EC3-DBA1-A8D8-F29E-DB6CC96C056A}"/>
+              </a:ext>
+            </a:extLst>
+          </p:cNvPr>
+          <p:cNvSpPr txBox="1"/>
+          <p:nvPr/>
+        </p:nvSpPr>
+        <p:spPr>
+          <a:xfrm>
+            <a:off x="1496705" y="2449255"/>
+            <a:ext cx="3986783" cy="246221"/>
+          </a:xfrm>
+          <a:prstGeom prst="rect">
+            <a:avLst/>
+          </a:prstGeom>
+          <a:noFill/>
+        </p:spPr>
+        <p:txBody>
+          <a:bodyPr wrap="square">
+            <a:spAutoFit/>
+          </a:bodyPr>
+          <a:lstStyle/>
+          <a:p>
+            <a:pPr algn="l"/>
+            <a:r>
+              <a:rPr sz="1000">
+                <a:solidFill>
+                  <a:srgbClr val="0E1116"/>
+                </a:solidFill>
+              </a:rPr>
+              <a:t>nb interceptions, % duels gagnés</a:t>
+            </a:r>
+          </a:p>
+        </p:txBody>
+      </p:sp>
+      <p:sp>
+        <p:nvSpPr>
+          <p:cNvPr id="68" name="Rounded Rectangle 38">
+            <a:extLst>
+              <a:ext uri="{FF2B5EF4-FFF2-40B4-BE49-F238E27FC236}">
+                <a16:creationId xmlns:a16="http://schemas.microsoft.com/office/drawing/2014/main" id="{58327C7E-6C4C-5AB7-69BF-9C89FEA9A206}"/>
+              </a:ext>
+            </a:extLst>
+          </p:cNvPr>
+          <p:cNvSpPr/>
+          <p:nvPr/>
+        </p:nvSpPr>
+        <p:spPr>
+          <a:xfrm>
+            <a:off x="253115" y="2838069"/>
+            <a:ext cx="5303519" cy="878400"/>
+          </a:xfrm>
+          <a:prstGeom prst="roundRect">
+            <a:avLst>
+              <a:gd name="adj" fmla="val 11111"/>
+            </a:avLst>
+          </a:prstGeom>
+          <a:solidFill>
+            <a:srgbClr val="F2F6FB"/>
+          </a:solidFill>
+          <a:ln w="6350">
+            <a:solidFill>
+              <a:srgbClr val="CEDFEE"/>
+            </a:solidFill>
+          </a:ln>
+        </p:spPr>
+        <p:style>
+          <a:lnRef idx="1">
+            <a:schemeClr val="accent1"/>
+          </a:lnRef>
+          <a:fillRef idx="3">
+            <a:schemeClr val="accent1"/>
+          </a:fillRef>
+          <a:effectRef idx="2">
+            <a:schemeClr val="accent1"/>
+          </a:effectRef>
+          <a:fontRef idx="minor">
+            <a:schemeClr val="lt1"/>
+          </a:fontRef>
+        </p:style>
+        <p:txBody>
+          <a:bodyPr rtlCol="0" anchor="ctr"/>
+          <a:lstStyle/>
+          <a:p>
+            <a:pPr algn="ctr"/>
+            <a:endParaRPr sz="2400"/>
+          </a:p>
+        </p:txBody>
+      </p:sp>
+      <p:sp>
+        <p:nvSpPr>
+          <p:cNvPr id="69" name="TextBox 39">
+            <a:extLst>
+              <a:ext uri="{FF2B5EF4-FFF2-40B4-BE49-F238E27FC236}">
+                <a16:creationId xmlns:a16="http://schemas.microsoft.com/office/drawing/2014/main" id="{B32A587C-158D-B962-ADC3-0B5356595A80}"/>
+              </a:ext>
+            </a:extLst>
+          </p:cNvPr>
+          <p:cNvSpPr txBox="1"/>
+          <p:nvPr/>
+        </p:nvSpPr>
+        <p:spPr>
+          <a:xfrm>
+            <a:off x="288417" y="2926859"/>
+            <a:ext cx="410762" cy="297454"/>
+          </a:xfrm>
+          <a:prstGeom prst="rect">
+            <a:avLst/>
+          </a:prstGeom>
+          <a:noFill/>
+        </p:spPr>
+        <p:txBody>
+          <a:bodyPr wrap="square">
+            <a:spAutoFit/>
+          </a:bodyPr>
+          <a:lstStyle/>
+          <a:p>
+            <a:pPr algn="l"/>
+            <a:r>
+              <a:rPr lang="fr-FR" sz="1333" b="1" dirty="0">
+                <a:solidFill>
+                  <a:srgbClr val="0B61AC"/>
+                </a:solidFill>
+              </a:rPr>
+              <a:t>F2</a:t>
+            </a:r>
+            <a:endParaRPr sz="1333" b="1" dirty="0">
+              <a:solidFill>
+                <a:srgbClr val="0B61AC"/>
+              </a:solidFill>
+            </a:endParaRPr>
+          </a:p>
+        </p:txBody>
+      </p:sp>
+      <p:sp>
+        <p:nvSpPr>
+          <p:cNvPr id="72" name="TextBox 40">
+            <a:extLst>
+              <a:ext uri="{FF2B5EF4-FFF2-40B4-BE49-F238E27FC236}">
+                <a16:creationId xmlns:a16="http://schemas.microsoft.com/office/drawing/2014/main" id="{F2EC884A-074A-6CA6-C0B8-8ABB43D1E10E}"/>
+              </a:ext>
+            </a:extLst>
+          </p:cNvPr>
+          <p:cNvSpPr txBox="1"/>
+          <p:nvPr/>
+        </p:nvSpPr>
+        <p:spPr>
+          <a:xfrm>
+            <a:off x="716417" y="2928188"/>
+            <a:ext cx="3377183" cy="287323"/>
+          </a:xfrm>
+          <a:prstGeom prst="rect">
+            <a:avLst/>
+          </a:prstGeom>
+          <a:noFill/>
+        </p:spPr>
+        <p:txBody>
+          <a:bodyPr wrap="square">
+            <a:spAutoFit/>
+          </a:bodyPr>
+          <a:lstStyle/>
+          <a:p>
+            <a:pPr algn="l"/>
+            <a:r>
+              <a:rPr sz="1267" b="1">
+                <a:solidFill>
+                  <a:srgbClr val="0E1116"/>
+                </a:solidFill>
+              </a:rPr>
+              <a:t>Avoir plus d'impact défensif</a:t>
+            </a:r>
+          </a:p>
+        </p:txBody>
+      </p:sp>
+      <p:sp>
+        <p:nvSpPr>
+          <p:cNvPr id="77" name="Rounded Rectangle 41">
+            <a:extLst>
+              <a:ext uri="{FF2B5EF4-FFF2-40B4-BE49-F238E27FC236}">
+                <a16:creationId xmlns:a16="http://schemas.microsoft.com/office/drawing/2014/main" id="{1A8BBDE0-7589-7396-9282-7CB1B2DA47D8}"/>
+              </a:ext>
+            </a:extLst>
+          </p:cNvPr>
+          <p:cNvSpPr/>
+          <p:nvPr/>
+        </p:nvSpPr>
+        <p:spPr>
+          <a:xfrm>
+            <a:off x="4273563" y="2928187"/>
+            <a:ext cx="1219200" cy="268224"/>
+          </a:xfrm>
+          <a:prstGeom prst="roundRect">
+            <a:avLst>
+              <a:gd name="adj" fmla="val 36363"/>
+            </a:avLst>
+          </a:prstGeom>
+          <a:solidFill>
+            <a:srgbClr val="FFFFFF"/>
+          </a:solidFill>
+          <a:ln w="10160">
+            <a:solidFill>
+              <a:srgbClr val="5E6B82"/>
+            </a:solidFill>
+          </a:ln>
+        </p:spPr>
+        <p:style>
+          <a:lnRef idx="1">
+            <a:schemeClr val="accent1"/>
+          </a:lnRef>
+          <a:fillRef idx="3">
+            <a:schemeClr val="accent1"/>
+          </a:fillRef>
+          <a:effectRef idx="2">
+            <a:schemeClr val="accent1"/>
+          </a:effectRef>
+          <a:fontRef idx="minor">
+            <a:schemeClr val="lt1"/>
+          </a:fontRef>
+        </p:style>
+        <p:txBody>
+          <a:bodyPr rtlCol="0" anchor="ctr"/>
+          <a:lstStyle/>
+          <a:p>
+            <a:pPr algn="ctr"/>
+            <a:endParaRPr sz="2400"/>
+          </a:p>
+        </p:txBody>
+      </p:sp>
+      <p:sp>
+        <p:nvSpPr>
+          <p:cNvPr id="78" name="TextBox 42">
+            <a:extLst>
+              <a:ext uri="{FF2B5EF4-FFF2-40B4-BE49-F238E27FC236}">
+                <a16:creationId xmlns:a16="http://schemas.microsoft.com/office/drawing/2014/main" id="{00D82A62-F38F-12A3-8B84-74DCA807C624}"/>
+              </a:ext>
+            </a:extLst>
+          </p:cNvPr>
+          <p:cNvSpPr txBox="1"/>
+          <p:nvPr/>
+        </p:nvSpPr>
+        <p:spPr>
+          <a:xfrm>
+            <a:off x="4264288" y="2940379"/>
+            <a:ext cx="1219200" cy="246221"/>
+          </a:xfrm>
+          <a:prstGeom prst="rect">
+            <a:avLst/>
+          </a:prstGeom>
+          <a:noFill/>
+        </p:spPr>
+        <p:txBody>
+          <a:bodyPr wrap="square">
+            <a:spAutoFit/>
+          </a:bodyPr>
+          <a:lstStyle/>
+          <a:p>
+            <a:pPr algn="ctr"/>
+            <a:r>
+              <a:rPr sz="1000" b="1">
+                <a:solidFill>
+                  <a:srgbClr val="5E6B82"/>
+                </a:solidFill>
+              </a:rPr>
+              <a:t>À lancer</a:t>
+            </a:r>
+          </a:p>
+        </p:txBody>
+      </p:sp>
+      <p:sp>
+        <p:nvSpPr>
+          <p:cNvPr id="79" name="TextBox 43">
+            <a:extLst>
+              <a:ext uri="{FF2B5EF4-FFF2-40B4-BE49-F238E27FC236}">
+                <a16:creationId xmlns:a16="http://schemas.microsoft.com/office/drawing/2014/main" id="{8C878A65-97BA-6C70-81D6-3CD5C93CC332}"/>
+              </a:ext>
+            </a:extLst>
+          </p:cNvPr>
+          <p:cNvSpPr txBox="1"/>
+          <p:nvPr/>
+        </p:nvSpPr>
+        <p:spPr>
+          <a:xfrm>
+            <a:off x="326272" y="3232989"/>
+            <a:ext cx="1158240" cy="235898"/>
+          </a:xfrm>
+          <a:prstGeom prst="rect">
+            <a:avLst/>
+          </a:prstGeom>
+          <a:noFill/>
+        </p:spPr>
+        <p:txBody>
+          <a:bodyPr wrap="square">
+            <a:spAutoFit/>
+          </a:bodyPr>
+          <a:lstStyle/>
+          <a:p>
+            <a:pPr algn="l"/>
+            <a:r>
+              <a:rPr sz="933" b="1">
+                <a:solidFill>
+                  <a:srgbClr val="0B4A89"/>
+                </a:solidFill>
+              </a:rPr>
+              <a:t>M'ENTRAÎNER</a:t>
+            </a:r>
+          </a:p>
+        </p:txBody>
+      </p:sp>
+      <p:sp>
+        <p:nvSpPr>
+          <p:cNvPr id="80" name="TextBox 44">
+            <a:extLst>
+              <a:ext uri="{FF2B5EF4-FFF2-40B4-BE49-F238E27FC236}">
+                <a16:creationId xmlns:a16="http://schemas.microsoft.com/office/drawing/2014/main" id="{877AD5EB-4AFB-0004-AB54-1632E7AF58F8}"/>
+              </a:ext>
+            </a:extLst>
+          </p:cNvPr>
+          <p:cNvSpPr txBox="1"/>
+          <p:nvPr/>
+        </p:nvSpPr>
+        <p:spPr>
+          <a:xfrm>
+            <a:off x="1496705" y="3232989"/>
+            <a:ext cx="3986783" cy="246221"/>
+          </a:xfrm>
+          <a:prstGeom prst="rect">
+            <a:avLst/>
+          </a:prstGeom>
+          <a:noFill/>
+        </p:spPr>
+        <p:txBody>
+          <a:bodyPr wrap="square">
+            <a:spAutoFit/>
+          </a:bodyPr>
+          <a:lstStyle/>
+          <a:p>
+            <a:pPr algn="l"/>
+            <a:r>
+              <a:rPr sz="1000">
+                <a:solidFill>
+                  <a:srgbClr val="0E1116"/>
+                </a:solidFill>
+              </a:rPr>
+              <a:t>lire encore mieux le jeu et gagner des duels</a:t>
+            </a:r>
+          </a:p>
+        </p:txBody>
+      </p:sp>
+      <p:sp>
+        <p:nvSpPr>
+          <p:cNvPr id="81" name="TextBox 45">
+            <a:extLst>
+              <a:ext uri="{FF2B5EF4-FFF2-40B4-BE49-F238E27FC236}">
+                <a16:creationId xmlns:a16="http://schemas.microsoft.com/office/drawing/2014/main" id="{A028F68C-AED7-276A-5824-D824C2832ECA}"/>
+              </a:ext>
+            </a:extLst>
+          </p:cNvPr>
+          <p:cNvSpPr txBox="1"/>
+          <p:nvPr/>
+        </p:nvSpPr>
+        <p:spPr>
+          <a:xfrm>
+            <a:off x="326272" y="3452445"/>
+            <a:ext cx="1158240" cy="235898"/>
+          </a:xfrm>
+          <a:prstGeom prst="rect">
+            <a:avLst/>
+          </a:prstGeom>
+          <a:noFill/>
+        </p:spPr>
+        <p:txBody>
+          <a:bodyPr wrap="square">
+            <a:spAutoFit/>
+          </a:bodyPr>
+          <a:lstStyle/>
+          <a:p>
+            <a:pPr algn="l"/>
+            <a:r>
+              <a:rPr sz="933" b="1">
+                <a:solidFill>
+                  <a:srgbClr val="3C81BD"/>
+                </a:solidFill>
+              </a:rPr>
+              <a:t>PROGRESSER</a:t>
+            </a:r>
+          </a:p>
+        </p:txBody>
+      </p:sp>
+      <p:sp>
+        <p:nvSpPr>
+          <p:cNvPr id="82" name="TextBox 46">
+            <a:extLst>
+              <a:ext uri="{FF2B5EF4-FFF2-40B4-BE49-F238E27FC236}">
+                <a16:creationId xmlns:a16="http://schemas.microsoft.com/office/drawing/2014/main" id="{14797367-2EAC-AC10-6C57-5775E0420A8A}"/>
+              </a:ext>
+            </a:extLst>
+          </p:cNvPr>
+          <p:cNvSpPr txBox="1"/>
+          <p:nvPr/>
+        </p:nvSpPr>
+        <p:spPr>
+          <a:xfrm>
+            <a:off x="1496705" y="3452445"/>
+            <a:ext cx="3986783" cy="246221"/>
+          </a:xfrm>
+          <a:prstGeom prst="rect">
+            <a:avLst/>
+          </a:prstGeom>
+          <a:noFill/>
+        </p:spPr>
+        <p:txBody>
+          <a:bodyPr wrap="square">
+            <a:spAutoFit/>
+          </a:bodyPr>
+          <a:lstStyle/>
+          <a:p>
+            <a:pPr algn="l"/>
+            <a:r>
+              <a:rPr sz="1000">
+                <a:solidFill>
+                  <a:srgbClr val="0E1116"/>
+                </a:solidFill>
+              </a:rPr>
+              <a:t>nb interceptions, % duels gagnés</a:t>
+            </a:r>
+          </a:p>
+        </p:txBody>
+      </p:sp>
+      <p:sp>
+        <p:nvSpPr>
+          <p:cNvPr id="83" name="Rounded Rectangle 38">
+            <a:extLst>
+              <a:ext uri="{FF2B5EF4-FFF2-40B4-BE49-F238E27FC236}">
+                <a16:creationId xmlns:a16="http://schemas.microsoft.com/office/drawing/2014/main" id="{DD32375A-CF86-865D-B71C-9FDCD2C70416}"/>
+              </a:ext>
+            </a:extLst>
+          </p:cNvPr>
+          <p:cNvSpPr/>
+          <p:nvPr/>
+        </p:nvSpPr>
+        <p:spPr>
+          <a:xfrm>
+            <a:off x="254441" y="3801502"/>
+            <a:ext cx="5303519" cy="878400"/>
+          </a:xfrm>
+          <a:prstGeom prst="roundRect">
+            <a:avLst>
+              <a:gd name="adj" fmla="val 11111"/>
+            </a:avLst>
+          </a:prstGeom>
+          <a:solidFill>
+            <a:srgbClr val="F2F6FB"/>
+          </a:solidFill>
+          <a:ln w="6350">
+            <a:solidFill>
+              <a:srgbClr val="CEDFEE"/>
+            </a:solidFill>
+          </a:ln>
+        </p:spPr>
+        <p:style>
+          <a:lnRef idx="1">
+            <a:schemeClr val="accent1"/>
+          </a:lnRef>
+          <a:fillRef idx="3">
+            <a:schemeClr val="accent1"/>
+          </a:fillRef>
+          <a:effectRef idx="2">
+            <a:schemeClr val="accent1"/>
+          </a:effectRef>
+          <a:fontRef idx="minor">
+            <a:schemeClr val="lt1"/>
+          </a:fontRef>
+        </p:style>
+        <p:txBody>
+          <a:bodyPr rtlCol="0" anchor="ctr"/>
+          <a:lstStyle/>
+          <a:p>
+            <a:pPr algn="ctr"/>
+            <a:endParaRPr sz="2400"/>
+          </a:p>
+        </p:txBody>
+      </p:sp>
+      <p:sp>
+        <p:nvSpPr>
+          <p:cNvPr id="84" name="TextBox 39">
+            <a:extLst>
+              <a:ext uri="{FF2B5EF4-FFF2-40B4-BE49-F238E27FC236}">
+                <a16:creationId xmlns:a16="http://schemas.microsoft.com/office/drawing/2014/main" id="{12D33092-676D-6440-72E1-8CD7908DB312}"/>
+              </a:ext>
+            </a:extLst>
+          </p:cNvPr>
+          <p:cNvSpPr txBox="1"/>
+          <p:nvPr/>
+        </p:nvSpPr>
+        <p:spPr>
+          <a:xfrm>
+            <a:off x="288417" y="3890292"/>
+            <a:ext cx="410762" cy="297454"/>
+          </a:xfrm>
+          <a:prstGeom prst="rect">
+            <a:avLst/>
+          </a:prstGeom>
+          <a:noFill/>
+        </p:spPr>
+        <p:txBody>
+          <a:bodyPr wrap="square">
+            <a:spAutoFit/>
+          </a:bodyPr>
+          <a:lstStyle/>
+          <a:p>
+            <a:pPr algn="l"/>
+            <a:r>
+              <a:rPr lang="fr-FR" sz="1333" b="1">
+                <a:solidFill>
+                  <a:srgbClr val="0B61AC"/>
+                </a:solidFill>
+              </a:rPr>
+              <a:t>F</a:t>
+            </a:r>
+            <a:r>
+              <a:rPr lang="fr-FR" sz="1333" b="1" dirty="0">
+                <a:solidFill>
+                  <a:srgbClr val="0B61AC"/>
+                </a:solidFill>
+              </a:rPr>
+              <a:t>3</a:t>
+            </a:r>
+            <a:endParaRPr sz="1333" b="1" dirty="0">
+              <a:solidFill>
+                <a:srgbClr val="0B61AC"/>
+              </a:solidFill>
+            </a:endParaRPr>
+          </a:p>
+        </p:txBody>
+      </p:sp>
+      <p:sp>
+        <p:nvSpPr>
+          <p:cNvPr id="88" name="TextBox 40">
+            <a:extLst>
+              <a:ext uri="{FF2B5EF4-FFF2-40B4-BE49-F238E27FC236}">
+                <a16:creationId xmlns:a16="http://schemas.microsoft.com/office/drawing/2014/main" id="{0EB966B1-52B3-3B4C-3250-34F24F0478D5}"/>
+              </a:ext>
+            </a:extLst>
+          </p:cNvPr>
+          <p:cNvSpPr txBox="1"/>
+          <p:nvPr/>
+        </p:nvSpPr>
+        <p:spPr>
+          <a:xfrm>
+            <a:off x="716417" y="3891621"/>
+            <a:ext cx="3377183" cy="287323"/>
+          </a:xfrm>
+          <a:prstGeom prst="rect">
+            <a:avLst/>
+          </a:prstGeom>
+          <a:noFill/>
+        </p:spPr>
+        <p:txBody>
+          <a:bodyPr wrap="square">
+            <a:spAutoFit/>
+          </a:bodyPr>
+          <a:lstStyle/>
+          <a:p>
+            <a:pPr algn="l"/>
+            <a:r>
+              <a:rPr sz="1267" b="1">
+                <a:solidFill>
+                  <a:srgbClr val="0E1116"/>
+                </a:solidFill>
+              </a:rPr>
+              <a:t>Avoir plus d'impact défensif</a:t>
+            </a:r>
+          </a:p>
+        </p:txBody>
+      </p:sp>
+      <p:sp>
+        <p:nvSpPr>
+          <p:cNvPr id="93" name="Rounded Rectangle 41">
+            <a:extLst>
+              <a:ext uri="{FF2B5EF4-FFF2-40B4-BE49-F238E27FC236}">
+                <a16:creationId xmlns:a16="http://schemas.microsoft.com/office/drawing/2014/main" id="{613C75EA-8944-3FFD-AA9E-72EFD4187BA8}"/>
+              </a:ext>
+            </a:extLst>
+          </p:cNvPr>
+          <p:cNvSpPr/>
+          <p:nvPr/>
+        </p:nvSpPr>
+        <p:spPr>
+          <a:xfrm>
+            <a:off x="4274889" y="3891620"/>
+            <a:ext cx="1219200" cy="268224"/>
+          </a:xfrm>
+          <a:prstGeom prst="roundRect">
+            <a:avLst>
+              <a:gd name="adj" fmla="val 36363"/>
+            </a:avLst>
+          </a:prstGeom>
+          <a:solidFill>
+            <a:srgbClr val="FFFFFF"/>
+          </a:solidFill>
+          <a:ln w="10160">
+            <a:solidFill>
+              <a:srgbClr val="5E6B82"/>
+            </a:solidFill>
+          </a:ln>
+        </p:spPr>
+        <p:style>
+          <a:lnRef idx="1">
+            <a:schemeClr val="accent1"/>
+          </a:lnRef>
+          <a:fillRef idx="3">
+            <a:schemeClr val="accent1"/>
+          </a:fillRef>
+          <a:effectRef idx="2">
+            <a:schemeClr val="accent1"/>
+          </a:effectRef>
+          <a:fontRef idx="minor">
+            <a:schemeClr val="lt1"/>
+          </a:fontRef>
+        </p:style>
+        <p:txBody>
+          <a:bodyPr rtlCol="0" anchor="ctr"/>
+          <a:lstStyle/>
+          <a:p>
+            <a:pPr algn="ctr"/>
+            <a:endParaRPr sz="2400"/>
+          </a:p>
+        </p:txBody>
+      </p:sp>
+      <p:sp>
+        <p:nvSpPr>
+          <p:cNvPr id="94" name="TextBox 42">
+            <a:extLst>
+              <a:ext uri="{FF2B5EF4-FFF2-40B4-BE49-F238E27FC236}">
+                <a16:creationId xmlns:a16="http://schemas.microsoft.com/office/drawing/2014/main" id="{BF751DA2-6A5D-FCA1-E8FF-5F9C81AE7082}"/>
+              </a:ext>
+            </a:extLst>
+          </p:cNvPr>
+          <p:cNvSpPr txBox="1"/>
+          <p:nvPr/>
+        </p:nvSpPr>
+        <p:spPr>
+          <a:xfrm>
+            <a:off x="4264288" y="3903812"/>
+            <a:ext cx="1219200" cy="246221"/>
+          </a:xfrm>
+          <a:prstGeom prst="rect">
+            <a:avLst/>
+          </a:prstGeom>
+          <a:noFill/>
+        </p:spPr>
+        <p:txBody>
+          <a:bodyPr wrap="square">
+            <a:spAutoFit/>
+          </a:bodyPr>
+          <a:lstStyle/>
+          <a:p>
+            <a:pPr algn="ctr"/>
+            <a:r>
+              <a:rPr sz="1000" b="1">
+                <a:solidFill>
+                  <a:srgbClr val="5E6B82"/>
+                </a:solidFill>
+              </a:rPr>
+              <a:t>À lancer</a:t>
+            </a:r>
+          </a:p>
+        </p:txBody>
+      </p:sp>
+      <p:sp>
+        <p:nvSpPr>
+          <p:cNvPr id="95" name="TextBox 43">
+            <a:extLst>
+              <a:ext uri="{FF2B5EF4-FFF2-40B4-BE49-F238E27FC236}">
+                <a16:creationId xmlns:a16="http://schemas.microsoft.com/office/drawing/2014/main" id="{9069CBB9-2623-5690-574E-823087C0E0D0}"/>
+              </a:ext>
+            </a:extLst>
+          </p:cNvPr>
+          <p:cNvSpPr txBox="1"/>
+          <p:nvPr/>
+        </p:nvSpPr>
+        <p:spPr>
+          <a:xfrm>
+            <a:off x="326272" y="4196422"/>
+            <a:ext cx="1158240" cy="235898"/>
+          </a:xfrm>
+          <a:prstGeom prst="rect">
+            <a:avLst/>
+          </a:prstGeom>
+          <a:noFill/>
+        </p:spPr>
+        <p:txBody>
+          <a:bodyPr wrap="square">
+            <a:spAutoFit/>
+          </a:bodyPr>
+          <a:lstStyle/>
+          <a:p>
+            <a:pPr algn="l"/>
+            <a:r>
+              <a:rPr sz="933" b="1">
+                <a:solidFill>
+                  <a:srgbClr val="0B4A89"/>
+                </a:solidFill>
+              </a:rPr>
+              <a:t>M'ENTRAÎNER</a:t>
+            </a:r>
+          </a:p>
+        </p:txBody>
+      </p:sp>
+      <p:sp>
+        <p:nvSpPr>
+          <p:cNvPr id="96" name="TextBox 44">
+            <a:extLst>
+              <a:ext uri="{FF2B5EF4-FFF2-40B4-BE49-F238E27FC236}">
+                <a16:creationId xmlns:a16="http://schemas.microsoft.com/office/drawing/2014/main" id="{DB199D4D-68BD-CFAD-126F-0BDD6D10BE2E}"/>
+              </a:ext>
+            </a:extLst>
+          </p:cNvPr>
+          <p:cNvSpPr txBox="1"/>
+          <p:nvPr/>
+        </p:nvSpPr>
+        <p:spPr>
+          <a:xfrm>
+            <a:off x="1496705" y="4196422"/>
+            <a:ext cx="3986783" cy="246221"/>
+          </a:xfrm>
+          <a:prstGeom prst="rect">
+            <a:avLst/>
+          </a:prstGeom>
+          <a:noFill/>
+        </p:spPr>
+        <p:txBody>
+          <a:bodyPr wrap="square">
+            <a:spAutoFit/>
+          </a:bodyPr>
+          <a:lstStyle/>
+          <a:p>
+            <a:pPr algn="l"/>
+            <a:r>
+              <a:rPr sz="1000">
+                <a:solidFill>
+                  <a:srgbClr val="0E1116"/>
+                </a:solidFill>
+              </a:rPr>
+              <a:t>lire encore mieux le jeu et gagner des duels</a:t>
+            </a:r>
+          </a:p>
+        </p:txBody>
+      </p:sp>
+      <p:sp>
+        <p:nvSpPr>
+          <p:cNvPr id="97" name="TextBox 45">
+            <a:extLst>
+              <a:ext uri="{FF2B5EF4-FFF2-40B4-BE49-F238E27FC236}">
+                <a16:creationId xmlns:a16="http://schemas.microsoft.com/office/drawing/2014/main" id="{341937E3-5BFB-5630-B8AE-6E7CEF7E7F5F}"/>
+              </a:ext>
+            </a:extLst>
+          </p:cNvPr>
+          <p:cNvSpPr txBox="1"/>
+          <p:nvPr/>
+        </p:nvSpPr>
+        <p:spPr>
+          <a:xfrm>
+            <a:off x="326272" y="4415878"/>
+            <a:ext cx="1158240" cy="235898"/>
+          </a:xfrm>
+          <a:prstGeom prst="rect">
+            <a:avLst/>
+          </a:prstGeom>
+          <a:noFill/>
+        </p:spPr>
+        <p:txBody>
+          <a:bodyPr wrap="square">
+            <a:spAutoFit/>
+          </a:bodyPr>
+          <a:lstStyle/>
+          <a:p>
+            <a:pPr algn="l"/>
+            <a:r>
+              <a:rPr sz="933" b="1">
+                <a:solidFill>
+                  <a:srgbClr val="3C81BD"/>
+                </a:solidFill>
+              </a:rPr>
+              <a:t>PROGRESSER</a:t>
+            </a:r>
+          </a:p>
+        </p:txBody>
+      </p:sp>
+      <p:sp>
+        <p:nvSpPr>
+          <p:cNvPr id="98" name="TextBox 46">
+            <a:extLst>
+              <a:ext uri="{FF2B5EF4-FFF2-40B4-BE49-F238E27FC236}">
+                <a16:creationId xmlns:a16="http://schemas.microsoft.com/office/drawing/2014/main" id="{316E784F-0697-F314-A17F-059B28830A80}"/>
+              </a:ext>
+            </a:extLst>
+          </p:cNvPr>
+          <p:cNvSpPr txBox="1"/>
+          <p:nvPr/>
+        </p:nvSpPr>
+        <p:spPr>
+          <a:xfrm>
+            <a:off x="1496705" y="4415878"/>
+            <a:ext cx="3986783" cy="246221"/>
+          </a:xfrm>
+          <a:prstGeom prst="rect">
+            <a:avLst/>
+          </a:prstGeom>
+          <a:noFill/>
+        </p:spPr>
+        <p:txBody>
+          <a:bodyPr wrap="square">
+            <a:spAutoFit/>
+          </a:bodyPr>
+          <a:lstStyle/>
+          <a:p>
+            <a:pPr algn="l"/>
+            <a:r>
+              <a:rPr sz="1000">
+                <a:solidFill>
+                  <a:srgbClr val="0E1116"/>
+                </a:solidFill>
+              </a:rPr>
+              <a:t>nb interceptions, % duels gagnés</a:t>
+            </a:r>
+          </a:p>
+        </p:txBody>
+      </p:sp>
     </p:spTree>
   </p:cSld>
   <p:clrMapOvr>
@@ -15323,17 +15153,6 @@
 </file>
 
 <file path=customXml/item2.xml><?xml version="1.0" encoding="utf-8"?>
-<p:properties xmlns:p="http://schemas.microsoft.com/office/2006/metadata/properties" xmlns:xsi="http://www.w3.org/2001/XMLSchema-instance" xmlns:pc="http://schemas.microsoft.com/office/infopath/2007/PartnerControls">
-  <documentManagement>
-    <lcf76f155ced4ddcb4097134ff3c332f xmlns="046a9755-ea29-48fa-9f0b-19b0b314d595">
-      <Terms xmlns="http://schemas.microsoft.com/office/infopath/2007/PartnerControls"/>
-    </lcf76f155ced4ddcb4097134ff3c332f>
-    <TaxCatchAll xmlns="7d123aa0-5a38-4c1d-9f73-855f68195115" xsi:nil="true"/>
-  </documentManagement>
-</p:properties>
-</file>
-
-<file path=customXml/item3.xml><?xml version="1.0" encoding="utf-8"?>
 <ct:contentTypeSchema xmlns:ct="http://schemas.microsoft.com/office/2006/metadata/contentType" xmlns:ma="http://schemas.microsoft.com/office/2006/metadata/properties/metaAttributes" ct:_="" ma:_="" ma:contentTypeName="Document" ma:contentTypeID="0x010100CF44338EC5E43C46971D0A4FF51A45E8" ma:contentTypeVersion="10" ma:contentTypeDescription="Crée un document." ma:contentTypeScope="" ma:versionID="d5126d556fffeee4c375c5b45702895e">
   <xsd:schema xmlns:xsd="http://www.w3.org/2001/XMLSchema" xmlns:xs="http://www.w3.org/2001/XMLSchema" xmlns:p="http://schemas.microsoft.com/office/2006/metadata/properties" xmlns:ns2="046a9755-ea29-48fa-9f0b-19b0b314d595" xmlns:ns3="7d123aa0-5a38-4c1d-9f73-855f68195115" targetNamespace="http://schemas.microsoft.com/office/2006/metadata/properties" ma:root="true" ma:fieldsID="594847fc14e78f85b38718fbc01a5d6f" ns2:_="" ns3:_="">
     <xsd:import namespace="046a9755-ea29-48fa-9f0b-19b0b314d595"/>
@@ -15522,6 +15341,17 @@
 </ct:contentTypeSchema>
 </file>
 
+<file path=customXml/item3.xml><?xml version="1.0" encoding="utf-8"?>
+<p:properties xmlns:p="http://schemas.microsoft.com/office/2006/metadata/properties" xmlns:xsi="http://www.w3.org/2001/XMLSchema-instance" xmlns:pc="http://schemas.microsoft.com/office/infopath/2007/PartnerControls">
+  <documentManagement>
+    <lcf76f155ced4ddcb4097134ff3c332f xmlns="046a9755-ea29-48fa-9f0b-19b0b314d595">
+      <Terms xmlns="http://schemas.microsoft.com/office/infopath/2007/PartnerControls"/>
+    </lcf76f155ced4ddcb4097134ff3c332f>
+    <TaxCatchAll xmlns="7d123aa0-5a38-4c1d-9f73-855f68195115" xsi:nil="true"/>
+  </documentManagement>
+</p:properties>
+</file>
+
 <file path=customXml/itemProps1.xml><?xml version="1.0" encoding="utf-8"?>
 <ds:datastoreItem xmlns:ds="http://schemas.openxmlformats.org/officeDocument/2006/customXml" ds:itemID="{A522F5CE-35F4-49AE-8D5A-0F83C5609FD9}">
   <ds:schemaRefs>
@@ -15531,17 +15361,6 @@
 </file>
 
 <file path=customXml/itemProps2.xml><?xml version="1.0" encoding="utf-8"?>
-<ds:datastoreItem xmlns:ds="http://schemas.openxmlformats.org/officeDocument/2006/customXml" ds:itemID="{A29D3CE5-AFB3-4DE2-BF48-0E041A51255C}">
-  <ds:schemaRefs>
-    <ds:schemaRef ds:uri="http://schemas.microsoft.com/office/2006/metadata/properties"/>
-    <ds:schemaRef ds:uri="http://schemas.microsoft.com/office/infopath/2007/PartnerControls"/>
-    <ds:schemaRef ds:uri="046a9755-ea29-48fa-9f0b-19b0b314d595"/>
-    <ds:schemaRef ds:uri="7d123aa0-5a38-4c1d-9f73-855f68195115"/>
-  </ds:schemaRefs>
-</ds:datastoreItem>
-</file>
-
-<file path=customXml/itemProps3.xml><?xml version="1.0" encoding="utf-8"?>
 <ds:datastoreItem xmlns:ds="http://schemas.openxmlformats.org/officeDocument/2006/customXml" ds:itemID="{E612E0F1-03AF-4890-BB6D-96301D0B5681}">
   <ds:schemaRefs>
     <ds:schemaRef ds:uri="http://schemas.microsoft.com/office/2006/metadata/contentType"/>
@@ -15558,4 +15377,15 @@
     <ds:schemaRef ds:uri="http://schemas.microsoft.com/internal/obd"/>
   </ds:schemaRefs>
 </ds:datastoreItem>
+</file>
+
+<file path=customXml/itemProps3.xml><?xml version="1.0" encoding="utf-8"?>
+<ds:datastoreItem xmlns:ds="http://schemas.openxmlformats.org/officeDocument/2006/customXml" ds:itemID="{A29D3CE5-AFB3-4DE2-BF48-0E041A51255C}">
+  <ds:schemaRefs>
+    <ds:schemaRef ds:uri="http://schemas.microsoft.com/office/2006/metadata/properties"/>
+    <ds:schemaRef ds:uri="http://schemas.microsoft.com/office/infopath/2007/PartnerControls"/>
+    <ds:schemaRef ds:uri="046a9755-ea29-48fa-9f0b-19b0b314d595"/>
+    <ds:schemaRef ds:uri="7d123aa0-5a38-4c1d-9f73-855f68195115"/>
+  </ds:schemaRefs>
+</ds:datastoreItem>
 </file>